--- a/投影片/進階無線電_課程投影片.pptx
+++ b/投影片/進階無線電_課程投影片.pptx
@@ -32,16 +32,16 @@
     <p:sldId id="277" r:id="rId23"/>
     <p:sldId id="278" r:id="rId24"/>
     <p:sldId id="279" r:id="rId25"/>
-    <p:sldId id="293" r:id="rId26"/>
-    <p:sldId id="280" r:id="rId27"/>
-    <p:sldId id="281" r:id="rId28"/>
-    <p:sldId id="282" r:id="rId29"/>
-    <p:sldId id="283" r:id="rId30"/>
-    <p:sldId id="284" r:id="rId31"/>
-    <p:sldId id="285" r:id="rId32"/>
-    <p:sldId id="286" r:id="rId33"/>
-    <p:sldId id="287" r:id="rId34"/>
-    <p:sldId id="288" r:id="rId35"/>
+    <p:sldId id="280" r:id="rId26"/>
+    <p:sldId id="281" r:id="rId27"/>
+    <p:sldId id="282" r:id="rId28"/>
+    <p:sldId id="283" r:id="rId29"/>
+    <p:sldId id="285" r:id="rId30"/>
+    <p:sldId id="286" r:id="rId31"/>
+    <p:sldId id="287" r:id="rId32"/>
+    <p:sldId id="288" r:id="rId33"/>
+    <p:sldId id="293" r:id="rId34"/>
+    <p:sldId id="284" r:id="rId35"/>
     <p:sldId id="289" r:id="rId36"/>
     <p:sldId id="290" r:id="rId37"/>
     <p:sldId id="291" r:id="rId38"/>
@@ -1799,7 +1799,7 @@
           <a:p>
             <a:r>
               <a:rPr lang="en-US" dirty="0"/>
-              <a:t>概念圖，實拍待補：一台 145.050、一台 145.0625，相隔 12.5 kHz，兩邊寬頻邊帶重疊。25 kHz 或窄頻才分得開。最惡劣：設寬頻的人自己無感，受害的是鄰頻。</a:t>
+              <a:t>保護頻帶不是浪費，是給三件『真實世界的不完美』留的緩衝：①裙擺(訊號超出理論頻寬) ②發射漂移 ③接收濾波器不夠陡。FM 要多寬：寬頻約 9 kHz、窄頻只剩 1.5 kHz——窄頻幾乎沒緩衝，所以對頻率準確度/濾波器更嚴。這頁為下一段『中繼台為什麼位移要那麼大』鋪路。</a:t>
             </a:r>
           </a:p>
         </p:txBody>
@@ -1830,7 +1830,7 @@
     </p:spTree>
     <p:extLst>
       <p:ext uri="{BB962C8B-B14F-4D97-AF65-F5344CB8AC3E}">
-        <p14:creationId xmlns:p14="http://schemas.microsoft.com/office/powerpoint/2010/main" val="3117932438"/>
+        <p14:creationId xmlns:p14="http://schemas.microsoft.com/office/powerpoint/2010/main" val="1024086991"/>
       </p:ext>
     </p:extLst>
   </p:cSld>
@@ -1886,7 +1886,7 @@
           <a:p>
             <a:r>
               <a:rPr lang="en-US" dirty="0"/>
-              <a:t>保護頻帶不是浪費，是給三件『真實世界的不完美』留的緩衝：①裙擺(訊號超出理論頻寬) ②發射漂移 ③接收濾波器不夠陡。FM 要多寬：寬頻約 9 kHz、窄頻只剩 1.5 kHz——窄頻幾乎沒緩衝，所以對頻率準確度/濾波器更嚴。這頁為下一段『中繼台為什麼位移要那麼大』鋪路。</a:t>
+              <a:t>小實作標題頁。目標：每組一對無線電，一台寬頻+低功率、一台窄頻+高功率，頻率略微錯開，在SDR上疊出一寬一窄的形狀（形狀在下一頁題目頁展示）。</a:t>
             </a:r>
           </a:p>
         </p:txBody>
@@ -1973,7 +1973,7 @@
           <a:p>
             <a:r>
               <a:rPr lang="en-US" dirty="0"/>
-              <a:t>小實作標題頁。目標：每組一對無線電，一台寬頻+低功率、一台窄頻+高功率，頻率略微錯開，在SDR上疊出一寬一窄的形狀（形狀在下一頁題目頁展示）。</a:t>
+              <a:t>重要：原版頻率(145.0–146.65)踩到地雷——超出台灣2m(144–146)、壓到ISS/衛星145.800、鄰近呼叫145.500。已重排：六組各100kHz、全部在145.480以下、限制在2m內、避開145.500與145.800。同時發射改為『低功率+先看SDR』。開課前務必再對NCC頻段規劃與當地緊急/中繼/衛星/APRS頻率(講義附錄待查)。</a:t>
             </a:r>
           </a:p>
         </p:txBody>
@@ -2060,7 +2060,7 @@
           <a:p>
             <a:r>
               <a:rPr lang="en-US" dirty="0"/>
-              <a:t>重要：原版頻率(145.0–146.65)踩到地雷——超出台灣2m(144–146)、壓到ISS/衛星145.800、鄰近呼叫145.500。已重排：六組各100kHz、全部在145.480以下、限制在2m內、避開145.500與145.800。同時發射改為『低功率+先看SDR』。開課前務必再對NCC頻段規劃與當地緊急/中繼/衛星/APRS頻率(講義附錄待查)。</a:t>
+              <a:t>題目：一台寬頻+低功率(矮又寬)、一台窄頻+高功率(高又窄)，頻率錯開，開FFT Hold兩台輪流發，疊出一寬一窄的目標形狀。綜合Demo2+3：高度=功率、寬度=W/N,兩軸獨立。也是判讀『一個頻段裡幾台、各什麼設定』的基本功。</a:t>
             </a:r>
           </a:p>
         </p:txBody>
@@ -2147,7 +2147,7 @@
           <a:p>
             <a:r>
               <a:rPr lang="en-US" dirty="0"/>
-              <a:t>題目：一台寬頻+低功率(矮又寬)、一台窄頻+高功率(高又窄)，頻率錯開，開FFT Hold兩台輪流發，疊出一寬一窄的目標形狀。綜合Demo2+3：高度=功率、寬度=W/N,兩軸獨立。也是判讀『一個頻段裡幾台、各什麼設定』的基本功。</a:t>
+              <a:t>Demo 5。全課教學價值最高的一段。</a:t>
             </a:r>
           </a:p>
         </p:txBody>
@@ -2321,7 +2321,7 @@
           <a:p>
             <a:r>
               <a:rPr lang="en-US" dirty="0"/>
-              <a:t>動動腦=綜合設計題。中繼台同時收發(全雙工,基礎課已教,這裡不重講)。四個參數要學員自己決定並說為什麼：①位移(回扣保護頻帶+自我干擾:為何不能只差12.5k) ②亞音存取(S6) ③功率位置(S3) ④和鄰台協調(S5鄰頻重疊放大版)。陷阱:方向反/亞音錯/鄰台打架/位移太小自我干擾。加分可談反轉(聽輸入判斷能否直通)。</a:t>
+              <a:t>亞音的目的：在共用頻率上分群、過濾。機制=收端門檻，不動電波、不保密。中繼台常要求正確亞音。</a:t>
             </a:r>
           </a:p>
         </p:txBody>
@@ -2408,7 +2408,7 @@
           <a:p>
             <a:r>
               <a:rPr lang="en-US" dirty="0"/>
-              <a:t>Demo 5。全課教學價值最高的一段。</a:t>
+              <a:t>梳齒間隔就是亞音頻率。用格線(100Hz/格)當尺，數格子就讀出頻率，六個設定誤差都在 1.4% 內。亞音一點都藏不住。</a:t>
             </a:r>
           </a:p>
         </p:txBody>
@@ -2495,7 +2495,7 @@
           <a:p>
             <a:r>
               <a:rPr lang="en-US" dirty="0"/>
-              <a:t>亞音的目的：在共用頻率上分群、過濾。機制=收端門檻，不動電波、不保密。中繼台常要求正確亞音。</a:t>
+              <a:t>①⑤ 的 A 都沒發亞音，電波幾乎一樣，但 B 的 RX 亞音決定喇叭開不開。BUSY 燈亮＝機器收到了。任何 SDR 都收得到全部內容。</a:t>
             </a:r>
           </a:p>
         </p:txBody>
@@ -2582,7 +2582,7 @@
           <a:p>
             <a:r>
               <a:rPr lang="en-US" dirty="0"/>
-              <a:t>梳齒間隔就是亞音頻率。用格線(100Hz/格)當尺，數格子就讀出頻率，六個設定誤差都在 1.4% 內。亞音一點都藏不住。</a:t>
+              <a:t>動動腦=綜合設計題。中繼台同時收發(全雙工,基礎課已教,這裡不重講)。四個參數要學員自己決定並說為什麼：①位移(回扣保護頻帶+自我干擾:為何不能只差12.5k) ②亞音存取(S6) ③功率位置(S3) ④和鄰台協調(S5鄰頻重疊放大版)。陷阱:方向反/亞音錯/鄰台打架/位移太小自我干擾。加分可談反轉(聽輸入判斷能否直通)。</a:t>
             </a:r>
           </a:p>
         </p:txBody>
@@ -2604,7 +2604,7 @@
           <a:p>
             <a:fld id="{F7021451-1387-4CA6-816F-3879F97B5CBC}" type="slidenum">
               <a:rPr lang="en-US"/>
-              <a:t>33</a:t>
+              <a:t>34</a:t>
             </a:fld>
             <a:endParaRPr lang="en-US"/>
           </a:p>
@@ -2669,7 +2669,7 @@
           <a:p>
             <a:r>
               <a:rPr lang="en-US" dirty="0"/>
-              <a:t>①⑤ 的 A 都沒發亞音，電波幾乎一樣，但 B 的 RX 亞音決定喇叭開不開。BUSY 燈亮＝機器收到了。任何 SDR 都收得到全部內容。</a:t>
+              <a:t>靜噪還沒實測，先留占位。接在 Demo 5 後講最順：SQL 是『兩道門』的第一道。之後補：同一訊號 SQL 高/低兩張，畫面一樣。</a:t>
             </a:r>
           </a:p>
         </p:txBody>
@@ -2691,7 +2691,7 @@
           <a:p>
             <a:fld id="{F7021451-1387-4CA6-816F-3879F97B5CBC}" type="slidenum">
               <a:rPr lang="en-US"/>
-              <a:t>34</a:t>
+              <a:t>35</a:t>
             </a:fld>
             <a:endParaRPr lang="en-US"/>
           </a:p>
@@ -2756,7 +2756,7 @@
           <a:p>
             <a:r>
               <a:rPr lang="en-US" dirty="0"/>
-              <a:t>靜噪還沒實測，先留占位。接在 Demo 5 後講最順：SQL 是『兩道門』的第一道。之後補：同一訊號 SQL 高/低兩張，畫面一樣。</a:t>
+              <a:t>進入分組任務。</a:t>
             </a:r>
           </a:p>
         </p:txBody>
@@ -2778,7 +2778,7 @@
           <a:p>
             <a:fld id="{F7021451-1387-4CA6-816F-3879F97B5CBC}" type="slidenum">
               <a:rPr lang="en-US"/>
-              <a:t>35</a:t>
+              <a:t>36</a:t>
             </a:fld>
             <a:endParaRPr lang="en-US"/>
           </a:p>
@@ -2843,7 +2843,7 @@
           <a:p>
             <a:r>
               <a:rPr lang="en-US" dirty="0"/>
-              <a:t>進入分組任務。</a:t>
+              <a:t>四面向對應今天四個 demo。評分重點在推理過程，不是標準答案。要求每組講一個他們預先避開的故障。</a:t>
             </a:r>
           </a:p>
         </p:txBody>
@@ -2865,7 +2865,7 @@
           <a:p>
             <a:fld id="{F7021451-1387-4CA6-816F-3879F97B5CBC}" type="slidenum">
               <a:rPr lang="en-US"/>
-              <a:t>36</a:t>
+              <a:t>37</a:t>
             </a:fld>
             <a:endParaRPr lang="en-US"/>
           </a:p>
@@ -2885,93 +2885,6 @@
 </file>
 
 <file path=ppt/notesSlides/notesSlide37.xml><?xml version="1.0" encoding="utf-8"?>
-<p:notes xmlns:a="http://schemas.openxmlformats.org/drawingml/2006/main" xmlns:r="http://schemas.openxmlformats.org/officeDocument/2006/relationships" xmlns:p="http://schemas.openxmlformats.org/presentationml/2006/main">
-  <p:cSld>
-    <p:spTree>
-      <p:nvGrpSpPr>
-        <p:cNvPr id="1" name=""/>
-        <p:cNvGrpSpPr/>
-        <p:nvPr/>
-      </p:nvGrpSpPr>
-      <p:grpSpPr>
-        <a:xfrm>
-          <a:off x="0" y="0"/>
-          <a:ext cx="0" cy="0"/>
-          <a:chOff x="0" y="0"/>
-          <a:chExt cx="0" cy="0"/>
-        </a:xfrm>
-      </p:grpSpPr>
-      <p:sp>
-        <p:nvSpPr>
-          <p:cNvPr id="2" name="Slide Image Placeholder 1"/>
-          <p:cNvSpPr>
-            <a:spLocks noGrp="1" noRot="1" noChangeAspect="1"/>
-          </p:cNvSpPr>
-          <p:nvPr>
-            <p:ph type="sldImg"/>
-          </p:nvPr>
-        </p:nvSpPr>
-        <p:spPr/>
-      </p:sp>
-      <p:sp>
-        <p:nvSpPr>
-          <p:cNvPr id="3" name="Notes Placeholder 2"/>
-          <p:cNvSpPr>
-            <a:spLocks noGrp="1"/>
-          </p:cNvSpPr>
-          <p:nvPr>
-            <p:ph type="body" idx="1"/>
-          </p:nvPr>
-        </p:nvSpPr>
-        <p:spPr/>
-        <p:txBody>
-          <a:bodyPr/>
-          <a:lstStyle/>
-          <a:p>
-            <a:r>
-              <a:rPr lang="en-US" dirty="0"/>
-              <a:t>四面向對應今天四個 demo。評分重點在推理過程，不是標準答案。要求每組講一個他們預先避開的故障。</a:t>
-            </a:r>
-          </a:p>
-        </p:txBody>
-      </p:sp>
-      <p:sp>
-        <p:nvSpPr>
-          <p:cNvPr id="4" name="Slide Number Placeholder 3"/>
-          <p:cNvSpPr>
-            <a:spLocks noGrp="1"/>
-          </p:cNvSpPr>
-          <p:nvPr>
-            <p:ph type="sldNum" sz="quarter" idx="10"/>
-          </p:nvPr>
-        </p:nvSpPr>
-        <p:spPr/>
-        <p:txBody>
-          <a:bodyPr/>
-          <a:lstStyle/>
-          <a:p>
-            <a:fld id="{F7021451-1387-4CA6-816F-3879F97B5CBC}" type="slidenum">
-              <a:rPr lang="en-US"/>
-              <a:t>37</a:t>
-            </a:fld>
-            <a:endParaRPr lang="en-US"/>
-          </a:p>
-        </p:txBody>
-      </p:sp>
-    </p:spTree>
-    <p:extLst>
-      <p:ext uri="{BB962C8B-B14F-4D97-AF65-F5344CB8AC3E}">
-        <p14:creationId xmlns:p14="http://schemas.microsoft.com/office/powerpoint/2010/main" val="1024086991"/>
-      </p:ext>
-    </p:extLst>
-  </p:cSld>
-  <p:clrMapOvr>
-    <a:masterClrMapping/>
-  </p:clrMapOvr>
-</p:notes>
-</file>
-
-<file path=ppt/notesSlides/notesSlide38.xml><?xml version="1.0" encoding="utf-8"?>
 <p:notes xmlns:a="http://schemas.openxmlformats.org/drawingml/2006/main" xmlns:r="http://schemas.openxmlformats.org/officeDocument/2006/relationships" xmlns:p="http://schemas.openxmlformats.org/presentationml/2006/main">
   <p:cSld>
     <p:spTree>
@@ -17189,1238 +17102,6 @@
 
 <file path=ppt/slides/slide25.xml><?xml version="1.0" encoding="utf-8"?>
 <p:sld xmlns:a="http://schemas.openxmlformats.org/drawingml/2006/main" xmlns:r="http://schemas.openxmlformats.org/officeDocument/2006/relationships" xmlns:p="http://schemas.openxmlformats.org/presentationml/2006/main">
-  <p:cSld>
-    <p:spTree>
-      <p:nvGrpSpPr>
-        <p:cNvPr id="1" name=""/>
-        <p:cNvGrpSpPr/>
-        <p:nvPr/>
-      </p:nvGrpSpPr>
-      <p:grpSpPr>
-        <a:xfrm>
-          <a:off x="0" y="0"/>
-          <a:ext cx="0" cy="0"/>
-          <a:chOff x="0" y="0"/>
-          <a:chExt cx="0" cy="0"/>
-        </a:xfrm>
-      </p:grpSpPr>
-      <p:sp>
-        <p:nvSpPr>
-          <p:cNvPr id="36" name="Shape 6"/>
-          <p:cNvSpPr/>
-          <p:nvPr/>
-        </p:nvSpPr>
-        <p:spPr>
-          <a:xfrm>
-            <a:off x="919025" y="3125724"/>
-            <a:ext cx="819680" cy="2560320"/>
-          </a:xfrm>
-          <a:prstGeom prst="ellipse">
-            <a:avLst/>
-          </a:prstGeom>
-          <a:solidFill>
-            <a:schemeClr val="accent1">
-              <a:lumMod val="60000"/>
-              <a:lumOff val="40000"/>
-            </a:schemeClr>
-          </a:solidFill>
-          <a:ln>
-            <a:solidFill>
-              <a:schemeClr val="accent1"/>
-            </a:solidFill>
-          </a:ln>
-        </p:spPr>
-      </p:sp>
-      <p:sp>
-        <p:nvSpPr>
-          <p:cNvPr id="2" name="Text 0"/>
-          <p:cNvSpPr/>
-          <p:nvPr/>
-        </p:nvSpPr>
-        <p:spPr>
-          <a:xfrm>
-            <a:off x="640080" y="384048"/>
-            <a:ext cx="10058400" cy="365760"/>
-          </a:xfrm>
-          <a:prstGeom prst="rect">
-            <a:avLst/>
-          </a:prstGeom>
-          <a:noFill/>
-          <a:ln/>
-        </p:spPr>
-        <p:txBody>
-          <a:bodyPr wrap="square" rtlCol="0" anchor="ctr"/>
-          <a:lstStyle/>
-          <a:p>
-            <a:pPr marL="0" indent="0">
-              <a:buNone/>
-            </a:pPr>
-            <a:r>
-              <a:rPr lang="en-US" sz="1400" b="1" kern="0" spc="200" dirty="0">
-                <a:solidFill>
-                  <a:srgbClr val="A44E36"/>
-                </a:solidFill>
-                <a:latin typeface="Calibri" pitchFamily="34" charset="0"/>
-                <a:ea typeface="Calibri" pitchFamily="34" charset="-122"/>
-                <a:cs typeface="Calibri" pitchFamily="34" charset="-120"/>
-              </a:rPr>
-              <a:t>SESSION 5 · 步進</a:t>
-            </a:r>
-            <a:endParaRPr lang="en-US" sz="1400" dirty="0"/>
-          </a:p>
-        </p:txBody>
-      </p:sp>
-      <p:sp>
-        <p:nvSpPr>
-          <p:cNvPr id="3" name="Text 1"/>
-          <p:cNvSpPr/>
-          <p:nvPr/>
-        </p:nvSpPr>
-        <p:spPr>
-          <a:xfrm>
-            <a:off x="603504" y="713232"/>
-            <a:ext cx="10972800" cy="777240"/>
-          </a:xfrm>
-          <a:prstGeom prst="rect">
-            <a:avLst/>
-          </a:prstGeom>
-          <a:noFill/>
-          <a:ln/>
-        </p:spPr>
-        <p:txBody>
-          <a:bodyPr wrap="square" rtlCol="0" anchor="ctr"/>
-          <a:lstStyle/>
-          <a:p>
-            <a:pPr marL="0" indent="0">
-              <a:buNone/>
-            </a:pPr>
-            <a:r>
-              <a:rPr lang="en-US" sz="3200" b="1" dirty="0">
-                <a:solidFill>
-                  <a:srgbClr val="3A2E28"/>
-                </a:solidFill>
-                <a:latin typeface="Cambria" pitchFamily="34" charset="0"/>
-                <a:ea typeface="Cambria" pitchFamily="34" charset="-122"/>
-                <a:cs typeface="Cambria" pitchFamily="34" charset="-120"/>
-              </a:rPr>
-              <a:t>步進沒協調 → 鄰頻重疊</a:t>
-            </a:r>
-            <a:endParaRPr lang="en-US" sz="3200" dirty="0"/>
-          </a:p>
-        </p:txBody>
-      </p:sp>
-      <p:sp>
-        <p:nvSpPr>
-          <p:cNvPr id="4" name="Text 2"/>
-          <p:cNvSpPr/>
-          <p:nvPr/>
-        </p:nvSpPr>
-        <p:spPr>
-          <a:xfrm>
-            <a:off x="822960" y="1572768"/>
-            <a:ext cx="5486400" cy="365760"/>
-          </a:xfrm>
-          <a:prstGeom prst="rect">
-            <a:avLst/>
-          </a:prstGeom>
-          <a:noFill/>
-          <a:ln/>
-        </p:spPr>
-        <p:txBody>
-          <a:bodyPr wrap="square" rtlCol="0" anchor="ctr"/>
-          <a:lstStyle/>
-          <a:p>
-            <a:pPr marL="0" indent="0">
-              <a:buNone/>
-            </a:pPr>
-            <a:r>
-              <a:rPr lang="en-US" sz="1500" b="1" dirty="0">
-                <a:solidFill>
-                  <a:srgbClr val="A44E36"/>
-                </a:solidFill>
-                <a:latin typeface="Calibri" pitchFamily="34" charset="0"/>
-                <a:ea typeface="Calibri" pitchFamily="34" charset="-122"/>
-                <a:cs typeface="Calibri" pitchFamily="34" charset="-120"/>
-              </a:rPr>
-              <a:t>✗  只差 12.5 kHz + 兩邊都寬頻</a:t>
-            </a:r>
-            <a:endParaRPr lang="en-US" sz="1500" dirty="0"/>
-          </a:p>
-        </p:txBody>
-      </p:sp>
-      <p:sp>
-        <p:nvSpPr>
-          <p:cNvPr id="7" name="Text 5"/>
-          <p:cNvSpPr/>
-          <p:nvPr/>
-        </p:nvSpPr>
-        <p:spPr>
-          <a:xfrm>
-            <a:off x="6949440" y="1572768"/>
-            <a:ext cx="5029200" cy="365760"/>
-          </a:xfrm>
-          <a:prstGeom prst="rect">
-            <a:avLst/>
-          </a:prstGeom>
-          <a:noFill/>
-          <a:ln/>
-        </p:spPr>
-        <p:txBody>
-          <a:bodyPr wrap="square" rtlCol="0" anchor="ctr"/>
-          <a:lstStyle/>
-          <a:p>
-            <a:pPr marL="0" indent="0">
-              <a:buNone/>
-            </a:pPr>
-            <a:r>
-              <a:rPr lang="en-US" sz="1500" b="1" dirty="0">
-                <a:solidFill>
-                  <a:srgbClr val="4E6B50"/>
-                </a:solidFill>
-                <a:latin typeface="Calibri" pitchFamily="34" charset="0"/>
-                <a:ea typeface="Calibri" pitchFamily="34" charset="-122"/>
-                <a:cs typeface="Calibri" pitchFamily="34" charset="-120"/>
-              </a:rPr>
-              <a:t>✓  拉到 25 kHz 或改窄頻</a:t>
-            </a:r>
-            <a:endParaRPr lang="en-US" sz="1500" dirty="0"/>
-          </a:p>
-        </p:txBody>
-      </p:sp>
-      <p:sp>
-        <p:nvSpPr>
-          <p:cNvPr id="8" name="Shape 6"/>
-          <p:cNvSpPr/>
-          <p:nvPr/>
-        </p:nvSpPr>
-        <p:spPr>
-          <a:xfrm>
-            <a:off x="5095615" y="2633472"/>
-            <a:ext cx="2011680" cy="2560320"/>
-          </a:xfrm>
-          <a:prstGeom prst="ellipse">
-            <a:avLst/>
-          </a:prstGeom>
-          <a:solidFill>
-            <a:srgbClr val="8AA08C">
-              <a:alpha val="78000"/>
-            </a:srgbClr>
-          </a:solidFill>
-          <a:ln/>
-        </p:spPr>
-      </p:sp>
-      <p:sp>
-        <p:nvSpPr>
-          <p:cNvPr id="9" name="Shape 7"/>
-          <p:cNvSpPr/>
-          <p:nvPr/>
-        </p:nvSpPr>
-        <p:spPr>
-          <a:xfrm>
-            <a:off x="9235440" y="2697480"/>
-            <a:ext cx="2011680" cy="2560320"/>
-          </a:xfrm>
-          <a:prstGeom prst="ellipse">
-            <a:avLst/>
-          </a:prstGeom>
-          <a:solidFill>
-            <a:srgbClr val="5A4038">
-              <a:alpha val="78000"/>
-            </a:srgbClr>
-          </a:solidFill>
-          <a:ln/>
-        </p:spPr>
-      </p:sp>
-      <p:sp>
-        <p:nvSpPr>
-          <p:cNvPr id="11" name="Shape 9"/>
-          <p:cNvSpPr/>
-          <p:nvPr/>
-        </p:nvSpPr>
-        <p:spPr>
-          <a:xfrm>
-            <a:off x="822960" y="3977640"/>
-            <a:ext cx="10515600" cy="0"/>
-          </a:xfrm>
-          <a:prstGeom prst="line">
-            <a:avLst/>
-          </a:prstGeom>
-          <a:noFill/>
-          <a:ln w="19050">
-            <a:solidFill>
-              <a:srgbClr val="8C7A6E"/>
-            </a:solidFill>
-            <a:prstDash val="solid"/>
-          </a:ln>
-        </p:spPr>
-      </p:sp>
-      <p:sp>
-        <p:nvSpPr>
-          <p:cNvPr id="12" name="Text 10"/>
-          <p:cNvSpPr/>
-          <p:nvPr/>
-        </p:nvSpPr>
-        <p:spPr>
-          <a:xfrm>
-            <a:off x="10607040" y="4050792"/>
-            <a:ext cx="1188720" cy="274320"/>
-          </a:xfrm>
-          <a:prstGeom prst="rect">
-            <a:avLst/>
-          </a:prstGeom>
-          <a:noFill/>
-          <a:ln/>
-        </p:spPr>
-        <p:txBody>
-          <a:bodyPr wrap="square" rtlCol="0" anchor="ctr"/>
-          <a:lstStyle/>
-          <a:p>
-            <a:pPr marL="0" indent="0">
-              <a:buNone/>
-            </a:pPr>
-            <a:r>
-              <a:rPr lang="en-US" sz="1100" i="1" dirty="0">
-                <a:solidFill>
-                  <a:srgbClr val="8C7A6E"/>
-                </a:solidFill>
-                <a:latin typeface="Calibri" pitchFamily="34" charset="0"/>
-                <a:ea typeface="Calibri" pitchFamily="34" charset="-122"/>
-                <a:cs typeface="Calibri" pitchFamily="34" charset="-120"/>
-              </a:rPr>
-              <a:t>頻率 →</a:t>
-            </a:r>
-            <a:endParaRPr lang="en-US" sz="1100" dirty="0"/>
-          </a:p>
-        </p:txBody>
-      </p:sp>
-      <p:sp>
-        <p:nvSpPr>
-          <p:cNvPr id="14" name="Text 12"/>
-          <p:cNvSpPr/>
-          <p:nvPr/>
-        </p:nvSpPr>
-        <p:spPr>
-          <a:xfrm>
-            <a:off x="7452360" y="3246120"/>
-            <a:ext cx="3383280" cy="365760"/>
-          </a:xfrm>
-          <a:prstGeom prst="rect">
-            <a:avLst/>
-          </a:prstGeom>
-          <a:noFill/>
-          <a:ln/>
-        </p:spPr>
-        <p:txBody>
-          <a:bodyPr wrap="square" rtlCol="0" anchor="ctr"/>
-          <a:lstStyle/>
-          <a:p>
-            <a:pPr marL="0" indent="0" algn="ctr">
-              <a:buNone/>
-            </a:pPr>
-            <a:r>
-              <a:rPr lang="en-US" sz="1200" b="1" dirty="0">
-                <a:solidFill>
-                  <a:srgbClr val="3D5A3F"/>
-                </a:solidFill>
-                <a:latin typeface="Calibri" pitchFamily="34" charset="0"/>
-                <a:ea typeface="Calibri" pitchFamily="34" charset="-122"/>
-                <a:cs typeface="Calibri" pitchFamily="34" charset="-120"/>
-              </a:rPr>
-              <a:t>中間留黑、互不干擾</a:t>
-            </a:r>
-            <a:endParaRPr lang="en-US" sz="1200" dirty="0"/>
-          </a:p>
-        </p:txBody>
-      </p:sp>
-      <p:sp>
-        <p:nvSpPr>
-          <p:cNvPr id="15" name="Shape 13"/>
-          <p:cNvSpPr/>
-          <p:nvPr/>
-        </p:nvSpPr>
-        <p:spPr>
-          <a:xfrm>
-            <a:off x="822960" y="4462272"/>
-            <a:ext cx="10515600" cy="566928"/>
-          </a:xfrm>
-          <a:prstGeom prst="roundRect">
-            <a:avLst>
-              <a:gd name="adj" fmla="val 16129"/>
-            </a:avLst>
-          </a:prstGeom>
-          <a:solidFill>
-            <a:srgbClr val="43312A"/>
-          </a:solidFill>
-          <a:ln/>
-        </p:spPr>
-      </p:sp>
-      <p:sp>
-        <p:nvSpPr>
-          <p:cNvPr id="16" name="Text 14"/>
-          <p:cNvSpPr/>
-          <p:nvPr/>
-        </p:nvSpPr>
-        <p:spPr>
-          <a:xfrm>
-            <a:off x="1097280" y="4462272"/>
-            <a:ext cx="10058400" cy="566928"/>
-          </a:xfrm>
-          <a:prstGeom prst="rect">
-            <a:avLst/>
-          </a:prstGeom>
-          <a:noFill/>
-          <a:ln/>
-        </p:spPr>
-        <p:txBody>
-          <a:bodyPr wrap="square" rtlCol="0" anchor="ctr"/>
-          <a:lstStyle/>
-          <a:p>
-            <a:pPr marL="0" indent="0">
-              <a:buNone/>
-            </a:pPr>
-            <a:r>
-              <a:rPr lang="en-US" sz="1600" b="1" dirty="0">
-                <a:solidFill>
-                  <a:srgbClr val="D99A5B"/>
-                </a:solidFill>
-                <a:latin typeface="Cambria" pitchFamily="34" charset="0"/>
-                <a:ea typeface="Cambria" pitchFamily="34" charset="-122"/>
-                <a:cs typeface="Cambria" pitchFamily="34" charset="-120"/>
-              </a:rPr>
-              <a:t>保護頻帶 </a:t>
-            </a:r>
-            <a:r>
-              <a:rPr lang="en-US" sz="1500" dirty="0">
-                <a:solidFill>
-                  <a:srgbClr val="FBF7F2"/>
-                </a:solidFill>
-                <a:latin typeface="Calibri" pitchFamily="34" charset="0"/>
-                <a:ea typeface="Calibri" pitchFamily="34" charset="-122"/>
-                <a:cs typeface="Calibri" pitchFamily="34" charset="-120"/>
-              </a:rPr>
-              <a:t>＝ 頻道間隔 − 佔用頻寬　　</a:t>
-            </a:r>
-            <a:r>
-              <a:rPr lang="en-US" sz="1500" b="1" dirty="0">
-                <a:solidFill>
-                  <a:srgbClr val="F0C0A8"/>
-                </a:solidFill>
-                <a:latin typeface="Calibri" pitchFamily="34" charset="0"/>
-                <a:ea typeface="Calibri" pitchFamily="34" charset="-122"/>
-                <a:cs typeface="Calibri" pitchFamily="34" charset="-120"/>
-              </a:rPr>
-              <a:t>算出負數 = 必定重疊</a:t>
-            </a:r>
-            <a:endParaRPr lang="en-US" sz="1600" dirty="0"/>
-          </a:p>
-        </p:txBody>
-      </p:sp>
-      <p:sp>
-        <p:nvSpPr>
-          <p:cNvPr id="17" name="Text 15"/>
-          <p:cNvSpPr/>
-          <p:nvPr/>
-        </p:nvSpPr>
-        <p:spPr>
-          <a:xfrm>
-            <a:off x="822960" y="5212080"/>
-            <a:ext cx="2377440" cy="310896"/>
-          </a:xfrm>
-          <a:prstGeom prst="rect">
-            <a:avLst/>
-          </a:prstGeom>
-          <a:noFill/>
-          <a:ln/>
-        </p:spPr>
-        <p:txBody>
-          <a:bodyPr wrap="square" rtlCol="0" anchor="ctr"/>
-          <a:lstStyle/>
-          <a:p>
-            <a:pPr marL="0" indent="0" algn="ctr">
-              <a:buNone/>
-            </a:pPr>
-            <a:r>
-              <a:rPr lang="en-US" sz="1150" b="1" dirty="0">
-                <a:solidFill>
-                  <a:srgbClr val="8C7A6E"/>
-                </a:solidFill>
-                <a:latin typeface="Calibri" pitchFamily="34" charset="0"/>
-                <a:ea typeface="Calibri" pitchFamily="34" charset="-122"/>
-                <a:cs typeface="Calibri" pitchFamily="34" charset="-120"/>
-              </a:rPr>
-              <a:t>設定</a:t>
-            </a:r>
-            <a:endParaRPr lang="en-US" sz="1150" dirty="0"/>
-          </a:p>
-        </p:txBody>
-      </p:sp>
-      <p:sp>
-        <p:nvSpPr>
-          <p:cNvPr id="18" name="Text 16"/>
-          <p:cNvSpPr/>
-          <p:nvPr/>
-        </p:nvSpPr>
-        <p:spPr>
-          <a:xfrm>
-            <a:off x="3200400" y="5212080"/>
-            <a:ext cx="2377440" cy="310896"/>
-          </a:xfrm>
-          <a:prstGeom prst="rect">
-            <a:avLst/>
-          </a:prstGeom>
-          <a:noFill/>
-          <a:ln/>
-        </p:spPr>
-        <p:txBody>
-          <a:bodyPr wrap="square" rtlCol="0" anchor="ctr"/>
-          <a:lstStyle/>
-          <a:p>
-            <a:pPr marL="0" indent="0" algn="ctr">
-              <a:buNone/>
-            </a:pPr>
-            <a:r>
-              <a:rPr lang="en-US" sz="1150" b="1" dirty="0">
-                <a:solidFill>
-                  <a:srgbClr val="8C7A6E"/>
-                </a:solidFill>
-                <a:latin typeface="Calibri" pitchFamily="34" charset="0"/>
-                <a:ea typeface="Calibri" pitchFamily="34" charset="-122"/>
-                <a:cs typeface="Calibri" pitchFamily="34" charset="-120"/>
-              </a:rPr>
-              <a:t>頻道間隔</a:t>
-            </a:r>
-            <a:endParaRPr lang="en-US" sz="1150" dirty="0"/>
-          </a:p>
-        </p:txBody>
-      </p:sp>
-      <p:sp>
-        <p:nvSpPr>
-          <p:cNvPr id="19" name="Text 17"/>
-          <p:cNvSpPr/>
-          <p:nvPr/>
-        </p:nvSpPr>
-        <p:spPr>
-          <a:xfrm>
-            <a:off x="5577840" y="5212080"/>
-            <a:ext cx="2377440" cy="310896"/>
-          </a:xfrm>
-          <a:prstGeom prst="rect">
-            <a:avLst/>
-          </a:prstGeom>
-          <a:noFill/>
-          <a:ln/>
-        </p:spPr>
-        <p:txBody>
-          <a:bodyPr wrap="square" rtlCol="0" anchor="ctr"/>
-          <a:lstStyle/>
-          <a:p>
-            <a:pPr marL="0" indent="0" algn="ctr">
-              <a:buNone/>
-            </a:pPr>
-            <a:r>
-              <a:rPr lang="en-US" sz="1150" b="1" dirty="0">
-                <a:solidFill>
-                  <a:srgbClr val="8C7A6E"/>
-                </a:solidFill>
-                <a:latin typeface="Calibri" pitchFamily="34" charset="0"/>
-                <a:ea typeface="Calibri" pitchFamily="34" charset="-122"/>
-                <a:cs typeface="Calibri" pitchFamily="34" charset="-120"/>
-              </a:rPr>
-              <a:t>保護頻帶</a:t>
-            </a:r>
-            <a:endParaRPr lang="en-US" sz="1150" dirty="0"/>
-          </a:p>
-        </p:txBody>
-      </p:sp>
-      <p:sp>
-        <p:nvSpPr>
-          <p:cNvPr id="20" name="Text 18"/>
-          <p:cNvSpPr/>
-          <p:nvPr/>
-        </p:nvSpPr>
-        <p:spPr>
-          <a:xfrm>
-            <a:off x="7955280" y="5212080"/>
-            <a:ext cx="3383280" cy="310896"/>
-          </a:xfrm>
-          <a:prstGeom prst="rect">
-            <a:avLst/>
-          </a:prstGeom>
-          <a:noFill/>
-          <a:ln/>
-        </p:spPr>
-        <p:txBody>
-          <a:bodyPr wrap="square" rtlCol="0" anchor="ctr"/>
-          <a:lstStyle/>
-          <a:p>
-            <a:pPr marL="0" indent="0" algn="ctr">
-              <a:buNone/>
-            </a:pPr>
-            <a:r>
-              <a:rPr lang="en-US" sz="1150" b="1" dirty="0">
-                <a:solidFill>
-                  <a:srgbClr val="8C7A6E"/>
-                </a:solidFill>
-                <a:latin typeface="Calibri" pitchFamily="34" charset="0"/>
-                <a:ea typeface="Calibri" pitchFamily="34" charset="-122"/>
-                <a:cs typeface="Calibri" pitchFamily="34" charset="-120"/>
-              </a:rPr>
-              <a:t>結果</a:t>
-            </a:r>
-            <a:endParaRPr lang="en-US" sz="1150" dirty="0"/>
-          </a:p>
-        </p:txBody>
-      </p:sp>
-      <p:sp>
-        <p:nvSpPr>
-          <p:cNvPr id="21" name="Text 19"/>
-          <p:cNvSpPr/>
-          <p:nvPr/>
-        </p:nvSpPr>
-        <p:spPr>
-          <a:xfrm>
-            <a:off x="822960" y="5541264"/>
-            <a:ext cx="2377440" cy="292608"/>
-          </a:xfrm>
-          <a:prstGeom prst="rect">
-            <a:avLst/>
-          </a:prstGeom>
-          <a:noFill/>
-          <a:ln/>
-        </p:spPr>
-        <p:txBody>
-          <a:bodyPr wrap="square" rtlCol="0" anchor="ctr"/>
-          <a:lstStyle/>
-          <a:p>
-            <a:pPr marL="0" indent="0" algn="ctr">
-              <a:buNone/>
-            </a:pPr>
-            <a:r>
-              <a:rPr lang="en-US" sz="1200" dirty="0">
-                <a:solidFill>
-                  <a:srgbClr val="3A2E28"/>
-                </a:solidFill>
-                <a:latin typeface="Calibri" pitchFamily="34" charset="0"/>
-                <a:ea typeface="Calibri" pitchFamily="34" charset="-122"/>
-                <a:cs typeface="Calibri" pitchFamily="34" charset="-120"/>
-              </a:rPr>
-              <a:t>寬頻 16k</a:t>
-            </a:r>
-            <a:endParaRPr lang="en-US" sz="1200" dirty="0"/>
-          </a:p>
-        </p:txBody>
-      </p:sp>
-      <p:sp>
-        <p:nvSpPr>
-          <p:cNvPr id="22" name="Text 20"/>
-          <p:cNvSpPr/>
-          <p:nvPr/>
-        </p:nvSpPr>
-        <p:spPr>
-          <a:xfrm>
-            <a:off x="3200400" y="5541264"/>
-            <a:ext cx="2377440" cy="292608"/>
-          </a:xfrm>
-          <a:prstGeom prst="rect">
-            <a:avLst/>
-          </a:prstGeom>
-          <a:noFill/>
-          <a:ln/>
-        </p:spPr>
-        <p:txBody>
-          <a:bodyPr wrap="square" rtlCol="0" anchor="ctr"/>
-          <a:lstStyle/>
-          <a:p>
-            <a:pPr marL="0" indent="0" algn="ctr">
-              <a:buNone/>
-            </a:pPr>
-            <a:r>
-              <a:rPr lang="en-US" sz="1200" dirty="0">
-                <a:solidFill>
-                  <a:srgbClr val="3A2E28"/>
-                </a:solidFill>
-                <a:latin typeface="Calibri" pitchFamily="34" charset="0"/>
-                <a:ea typeface="Calibri" pitchFamily="34" charset="-122"/>
-                <a:cs typeface="Calibri" pitchFamily="34" charset="-120"/>
-              </a:rPr>
-              <a:t>25 kHz</a:t>
-            </a:r>
-            <a:endParaRPr lang="en-US" sz="1200" dirty="0"/>
-          </a:p>
-        </p:txBody>
-      </p:sp>
-      <p:sp>
-        <p:nvSpPr>
-          <p:cNvPr id="23" name="Text 21"/>
-          <p:cNvSpPr/>
-          <p:nvPr/>
-        </p:nvSpPr>
-        <p:spPr>
-          <a:xfrm>
-            <a:off x="5577840" y="5541264"/>
-            <a:ext cx="2377440" cy="292608"/>
-          </a:xfrm>
-          <a:prstGeom prst="rect">
-            <a:avLst/>
-          </a:prstGeom>
-          <a:noFill/>
-          <a:ln/>
-        </p:spPr>
-        <p:txBody>
-          <a:bodyPr wrap="square" rtlCol="0" anchor="ctr"/>
-          <a:lstStyle/>
-          <a:p>
-            <a:pPr marL="0" indent="0" algn="ctr">
-              <a:buNone/>
-            </a:pPr>
-            <a:r>
-              <a:rPr lang="en-US" sz="1200" dirty="0">
-                <a:solidFill>
-                  <a:srgbClr val="3A2E28"/>
-                </a:solidFill>
-                <a:latin typeface="Calibri" pitchFamily="34" charset="0"/>
-                <a:ea typeface="Calibri" pitchFamily="34" charset="-122"/>
-                <a:cs typeface="Calibri" pitchFamily="34" charset="-120"/>
-              </a:rPr>
-              <a:t>+9 kHz</a:t>
-            </a:r>
-            <a:endParaRPr lang="en-US" sz="1200" dirty="0"/>
-          </a:p>
-        </p:txBody>
-      </p:sp>
-      <p:sp>
-        <p:nvSpPr>
-          <p:cNvPr id="24" name="Text 22"/>
-          <p:cNvSpPr/>
-          <p:nvPr/>
-        </p:nvSpPr>
-        <p:spPr>
-          <a:xfrm>
-            <a:off x="7955280" y="5541264"/>
-            <a:ext cx="3383280" cy="292608"/>
-          </a:xfrm>
-          <a:prstGeom prst="rect">
-            <a:avLst/>
-          </a:prstGeom>
-          <a:noFill/>
-          <a:ln/>
-        </p:spPr>
-        <p:txBody>
-          <a:bodyPr wrap="square" rtlCol="0" anchor="ctr"/>
-          <a:lstStyle/>
-          <a:p>
-            <a:pPr marL="0" indent="0" algn="ctr">
-              <a:buNone/>
-            </a:pPr>
-            <a:r>
-              <a:rPr lang="en-US" sz="1200" b="1" dirty="0">
-                <a:solidFill>
-                  <a:srgbClr val="8AA08C"/>
-                </a:solidFill>
-                <a:latin typeface="Calibri" pitchFamily="34" charset="0"/>
-                <a:ea typeface="Calibri" pitchFamily="34" charset="-122"/>
-                <a:cs typeface="Calibri" pitchFamily="34" charset="-120"/>
-              </a:rPr>
-              <a:t>安全</a:t>
-            </a:r>
-            <a:endParaRPr lang="en-US" sz="1200" dirty="0"/>
-          </a:p>
-        </p:txBody>
-      </p:sp>
-      <p:sp>
-        <p:nvSpPr>
-          <p:cNvPr id="25" name="Text 23"/>
-          <p:cNvSpPr/>
-          <p:nvPr/>
-        </p:nvSpPr>
-        <p:spPr>
-          <a:xfrm>
-            <a:off x="822960" y="5852160"/>
-            <a:ext cx="2377440" cy="292608"/>
-          </a:xfrm>
-          <a:prstGeom prst="rect">
-            <a:avLst/>
-          </a:prstGeom>
-          <a:noFill/>
-          <a:ln/>
-        </p:spPr>
-        <p:txBody>
-          <a:bodyPr wrap="square" rtlCol="0" anchor="ctr"/>
-          <a:lstStyle/>
-          <a:p>
-            <a:pPr marL="0" indent="0" algn="ctr">
-              <a:buNone/>
-            </a:pPr>
-            <a:r>
-              <a:rPr lang="en-US" sz="1200" dirty="0">
-                <a:solidFill>
-                  <a:srgbClr val="3A2E28"/>
-                </a:solidFill>
-                <a:latin typeface="Calibri" pitchFamily="34" charset="0"/>
-                <a:ea typeface="Calibri" pitchFamily="34" charset="-122"/>
-                <a:cs typeface="Calibri" pitchFamily="34" charset="-120"/>
-              </a:rPr>
-              <a:t>寬頻 16k</a:t>
-            </a:r>
-            <a:endParaRPr lang="en-US" sz="1200" dirty="0"/>
-          </a:p>
-        </p:txBody>
-      </p:sp>
-      <p:sp>
-        <p:nvSpPr>
-          <p:cNvPr id="26" name="Text 24"/>
-          <p:cNvSpPr/>
-          <p:nvPr/>
-        </p:nvSpPr>
-        <p:spPr>
-          <a:xfrm>
-            <a:off x="3200400" y="5852160"/>
-            <a:ext cx="2377440" cy="292608"/>
-          </a:xfrm>
-          <a:prstGeom prst="rect">
-            <a:avLst/>
-          </a:prstGeom>
-          <a:noFill/>
-          <a:ln/>
-        </p:spPr>
-        <p:txBody>
-          <a:bodyPr wrap="square" rtlCol="0" anchor="ctr"/>
-          <a:lstStyle/>
-          <a:p>
-            <a:pPr marL="0" indent="0" algn="ctr">
-              <a:buNone/>
-            </a:pPr>
-            <a:r>
-              <a:rPr lang="en-US" sz="1200" dirty="0">
-                <a:solidFill>
-                  <a:srgbClr val="3A2E28"/>
-                </a:solidFill>
-                <a:latin typeface="Calibri" pitchFamily="34" charset="0"/>
-                <a:ea typeface="Calibri" pitchFamily="34" charset="-122"/>
-                <a:cs typeface="Calibri" pitchFamily="34" charset="-120"/>
-              </a:rPr>
-              <a:t>12.5 kHz</a:t>
-            </a:r>
-            <a:endParaRPr lang="en-US" sz="1200" dirty="0"/>
-          </a:p>
-        </p:txBody>
-      </p:sp>
-      <p:sp>
-        <p:nvSpPr>
-          <p:cNvPr id="27" name="Text 25"/>
-          <p:cNvSpPr/>
-          <p:nvPr/>
-        </p:nvSpPr>
-        <p:spPr>
-          <a:xfrm>
-            <a:off x="5577840" y="5852160"/>
-            <a:ext cx="2377440" cy="292608"/>
-          </a:xfrm>
-          <a:prstGeom prst="rect">
-            <a:avLst/>
-          </a:prstGeom>
-          <a:noFill/>
-          <a:ln/>
-        </p:spPr>
-        <p:txBody>
-          <a:bodyPr wrap="square" rtlCol="0" anchor="ctr"/>
-          <a:lstStyle/>
-          <a:p>
-            <a:pPr marL="0" indent="0" algn="ctr">
-              <a:buNone/>
-            </a:pPr>
-            <a:r>
-              <a:rPr lang="en-US" sz="1200" dirty="0">
-                <a:solidFill>
-                  <a:srgbClr val="3A2E28"/>
-                </a:solidFill>
-                <a:latin typeface="Calibri" pitchFamily="34" charset="0"/>
-                <a:ea typeface="Calibri" pitchFamily="34" charset="-122"/>
-                <a:cs typeface="Calibri" pitchFamily="34" charset="-120"/>
-              </a:rPr>
-              <a:t>−3.5 kHz</a:t>
-            </a:r>
-            <a:endParaRPr lang="en-US" sz="1200" dirty="0"/>
-          </a:p>
-        </p:txBody>
-      </p:sp>
-      <p:sp>
-        <p:nvSpPr>
-          <p:cNvPr id="28" name="Text 26"/>
-          <p:cNvSpPr/>
-          <p:nvPr/>
-        </p:nvSpPr>
-        <p:spPr>
-          <a:xfrm>
-            <a:off x="7955280" y="5852160"/>
-            <a:ext cx="3383280" cy="292608"/>
-          </a:xfrm>
-          <a:prstGeom prst="rect">
-            <a:avLst/>
-          </a:prstGeom>
-          <a:noFill/>
-          <a:ln/>
-        </p:spPr>
-        <p:txBody>
-          <a:bodyPr wrap="square" rtlCol="0" anchor="ctr"/>
-          <a:lstStyle/>
-          <a:p>
-            <a:pPr marL="0" indent="0" algn="ctr">
-              <a:buNone/>
-            </a:pPr>
-            <a:r>
-              <a:rPr lang="en-US" sz="1200" b="1" dirty="0">
-                <a:solidFill>
-                  <a:srgbClr val="A44E36"/>
-                </a:solidFill>
-                <a:latin typeface="Calibri" pitchFamily="34" charset="0"/>
-                <a:ea typeface="Calibri" pitchFamily="34" charset="-122"/>
-                <a:cs typeface="Calibri" pitchFamily="34" charset="-120"/>
-              </a:rPr>
-              <a:t>重疊</a:t>
-            </a:r>
-            <a:endParaRPr lang="en-US" sz="1200" dirty="0"/>
-          </a:p>
-        </p:txBody>
-      </p:sp>
-      <p:sp>
-        <p:nvSpPr>
-          <p:cNvPr id="29" name="Text 27"/>
-          <p:cNvSpPr/>
-          <p:nvPr/>
-        </p:nvSpPr>
-        <p:spPr>
-          <a:xfrm>
-            <a:off x="822960" y="6163056"/>
-            <a:ext cx="2377440" cy="292608"/>
-          </a:xfrm>
-          <a:prstGeom prst="rect">
-            <a:avLst/>
-          </a:prstGeom>
-          <a:noFill/>
-          <a:ln/>
-        </p:spPr>
-        <p:txBody>
-          <a:bodyPr wrap="square" rtlCol="0" anchor="ctr"/>
-          <a:lstStyle/>
-          <a:p>
-            <a:pPr marL="0" indent="0" algn="ctr">
-              <a:buNone/>
-            </a:pPr>
-            <a:r>
-              <a:rPr lang="en-US" sz="1200" dirty="0">
-                <a:solidFill>
-                  <a:srgbClr val="3A2E28"/>
-                </a:solidFill>
-                <a:latin typeface="Calibri" pitchFamily="34" charset="0"/>
-                <a:ea typeface="Calibri" pitchFamily="34" charset="-122"/>
-                <a:cs typeface="Calibri" pitchFamily="34" charset="-120"/>
-              </a:rPr>
-              <a:t>窄頻 11k</a:t>
-            </a:r>
-            <a:endParaRPr lang="en-US" sz="1200" dirty="0"/>
-          </a:p>
-        </p:txBody>
-      </p:sp>
-      <p:sp>
-        <p:nvSpPr>
-          <p:cNvPr id="30" name="Text 28"/>
-          <p:cNvSpPr/>
-          <p:nvPr/>
-        </p:nvSpPr>
-        <p:spPr>
-          <a:xfrm>
-            <a:off x="3200400" y="6163056"/>
-            <a:ext cx="2377440" cy="292608"/>
-          </a:xfrm>
-          <a:prstGeom prst="rect">
-            <a:avLst/>
-          </a:prstGeom>
-          <a:noFill/>
-          <a:ln/>
-        </p:spPr>
-        <p:txBody>
-          <a:bodyPr wrap="square" rtlCol="0" anchor="ctr"/>
-          <a:lstStyle/>
-          <a:p>
-            <a:pPr marL="0" indent="0" algn="ctr">
-              <a:buNone/>
-            </a:pPr>
-            <a:r>
-              <a:rPr lang="en-US" sz="1200" dirty="0">
-                <a:solidFill>
-                  <a:srgbClr val="3A2E28"/>
-                </a:solidFill>
-                <a:latin typeface="Calibri" pitchFamily="34" charset="0"/>
-                <a:ea typeface="Calibri" pitchFamily="34" charset="-122"/>
-                <a:cs typeface="Calibri" pitchFamily="34" charset="-120"/>
-              </a:rPr>
-              <a:t>12.5 kHz</a:t>
-            </a:r>
-            <a:endParaRPr lang="en-US" sz="1200" dirty="0"/>
-          </a:p>
-        </p:txBody>
-      </p:sp>
-      <p:sp>
-        <p:nvSpPr>
-          <p:cNvPr id="31" name="Text 29"/>
-          <p:cNvSpPr/>
-          <p:nvPr/>
-        </p:nvSpPr>
-        <p:spPr>
-          <a:xfrm>
-            <a:off x="5577840" y="6163056"/>
-            <a:ext cx="2377440" cy="292608"/>
-          </a:xfrm>
-          <a:prstGeom prst="rect">
-            <a:avLst/>
-          </a:prstGeom>
-          <a:noFill/>
-          <a:ln/>
-        </p:spPr>
-        <p:txBody>
-          <a:bodyPr wrap="square" rtlCol="0" anchor="ctr"/>
-          <a:lstStyle/>
-          <a:p>
-            <a:pPr marL="0" indent="0" algn="ctr">
-              <a:buNone/>
-            </a:pPr>
-            <a:r>
-              <a:rPr lang="en-US" sz="1200" dirty="0">
-                <a:solidFill>
-                  <a:srgbClr val="3A2E28"/>
-                </a:solidFill>
-                <a:latin typeface="Calibri" pitchFamily="34" charset="0"/>
-                <a:ea typeface="Calibri" pitchFamily="34" charset="-122"/>
-                <a:cs typeface="Calibri" pitchFamily="34" charset="-120"/>
-              </a:rPr>
-              <a:t>+1.5 kHz</a:t>
-            </a:r>
-            <a:endParaRPr lang="en-US" sz="1200" dirty="0"/>
-          </a:p>
-        </p:txBody>
-      </p:sp>
-      <p:sp>
-        <p:nvSpPr>
-          <p:cNvPr id="32" name="Text 30"/>
-          <p:cNvSpPr/>
-          <p:nvPr/>
-        </p:nvSpPr>
-        <p:spPr>
-          <a:xfrm>
-            <a:off x="7955280" y="6163056"/>
-            <a:ext cx="3383280" cy="292608"/>
-          </a:xfrm>
-          <a:prstGeom prst="rect">
-            <a:avLst/>
-          </a:prstGeom>
-          <a:noFill/>
-          <a:ln/>
-        </p:spPr>
-        <p:txBody>
-          <a:bodyPr wrap="square" rtlCol="0" anchor="ctr"/>
-          <a:lstStyle/>
-          <a:p>
-            <a:pPr marL="0" indent="0" algn="ctr">
-              <a:buNone/>
-            </a:pPr>
-            <a:r>
-              <a:rPr lang="en-US" sz="1200" b="1" dirty="0">
-                <a:solidFill>
-                  <a:srgbClr val="D99A5B"/>
-                </a:solidFill>
-                <a:latin typeface="Calibri" pitchFamily="34" charset="0"/>
-                <a:ea typeface="Calibri" pitchFamily="34" charset="-122"/>
-                <a:cs typeface="Calibri" pitchFamily="34" charset="-120"/>
-              </a:rPr>
-              <a:t>勉強</a:t>
-            </a:r>
-            <a:endParaRPr lang="en-US" sz="1200" dirty="0"/>
-          </a:p>
-        </p:txBody>
-      </p:sp>
-      <p:sp>
-        <p:nvSpPr>
-          <p:cNvPr id="33" name="Text 31"/>
-          <p:cNvSpPr/>
-          <p:nvPr/>
-        </p:nvSpPr>
-        <p:spPr>
-          <a:xfrm>
-            <a:off x="822960" y="6528816"/>
-            <a:ext cx="10515600" cy="274320"/>
-          </a:xfrm>
-          <a:prstGeom prst="rect">
-            <a:avLst/>
-          </a:prstGeom>
-          <a:noFill/>
-          <a:ln/>
-        </p:spPr>
-        <p:txBody>
-          <a:bodyPr wrap="square" rtlCol="0" anchor="ctr"/>
-          <a:lstStyle/>
-          <a:p>
-            <a:pPr marL="0" indent="0">
-              <a:buNone/>
-            </a:pPr>
-            <a:r>
-              <a:rPr lang="en-US" sz="1000" i="1" dirty="0">
-                <a:solidFill>
-                  <a:srgbClr val="8C7A6E"/>
-                </a:solidFill>
-                <a:latin typeface="Calibri" pitchFamily="34" charset="0"/>
-                <a:ea typeface="Calibri" pitchFamily="34" charset="-122"/>
-                <a:cs typeface="Calibri" pitchFamily="34" charset="-120"/>
-              </a:rPr>
-              <a:t>※ 概念示意圖，實拍截圖待補（兩台相隔 12.5 kHz 同時發射）</a:t>
-            </a:r>
-            <a:endParaRPr lang="en-US" sz="1000" dirty="0"/>
-          </a:p>
-        </p:txBody>
-      </p:sp>
-      <p:sp>
-        <p:nvSpPr>
-          <p:cNvPr id="34" name="Shape 6"/>
-          <p:cNvSpPr/>
-          <p:nvPr/>
-        </p:nvSpPr>
-        <p:spPr>
-          <a:xfrm>
-            <a:off x="3214110" y="3075792"/>
-            <a:ext cx="926950" cy="2560320"/>
-          </a:xfrm>
-          <a:prstGeom prst="ellipse">
-            <a:avLst/>
-          </a:prstGeom>
-          <a:solidFill>
-            <a:schemeClr val="accent1">
-              <a:lumMod val="60000"/>
-              <a:lumOff val="40000"/>
-            </a:schemeClr>
-          </a:solidFill>
-          <a:ln>
-            <a:solidFill>
-              <a:schemeClr val="accent1"/>
-            </a:solidFill>
-          </a:ln>
-        </p:spPr>
-      </p:sp>
-      <p:sp>
-        <p:nvSpPr>
-          <p:cNvPr id="6" name="Shape 4"/>
-          <p:cNvSpPr/>
-          <p:nvPr/>
-        </p:nvSpPr>
-        <p:spPr>
-          <a:xfrm>
-            <a:off x="2813420" y="2807207"/>
-            <a:ext cx="938910" cy="2679192"/>
-          </a:xfrm>
-          <a:prstGeom prst="ellipse">
-            <a:avLst/>
-          </a:prstGeom>
-          <a:solidFill>
-            <a:schemeClr val="accent1">
-              <a:lumMod val="60000"/>
-              <a:lumOff val="40000"/>
-            </a:schemeClr>
-          </a:solidFill>
-          <a:ln>
-            <a:solidFill>
-              <a:schemeClr val="accent1"/>
-            </a:solidFill>
-          </a:ln>
-        </p:spPr>
-      </p:sp>
-      <p:sp>
-        <p:nvSpPr>
-          <p:cNvPr id="35" name="Shape 4"/>
-          <p:cNvSpPr/>
-          <p:nvPr/>
-        </p:nvSpPr>
-        <p:spPr>
-          <a:xfrm>
-            <a:off x="1247663" y="2824734"/>
-            <a:ext cx="991945" cy="2679192"/>
-          </a:xfrm>
-          <a:prstGeom prst="ellipse">
-            <a:avLst/>
-          </a:prstGeom>
-          <a:solidFill>
-            <a:schemeClr val="accent1">
-              <a:lumMod val="60000"/>
-              <a:lumOff val="40000"/>
-            </a:schemeClr>
-          </a:solidFill>
-          <a:ln>
-            <a:solidFill>
-              <a:schemeClr val="accent1"/>
-            </a:solidFill>
-          </a:ln>
-        </p:spPr>
-      </p:sp>
-      <p:sp>
-        <p:nvSpPr>
-          <p:cNvPr id="5" name="Shape 3"/>
-          <p:cNvSpPr/>
-          <p:nvPr/>
-        </p:nvSpPr>
-        <p:spPr>
-          <a:xfrm>
-            <a:off x="1752600" y="2145075"/>
-            <a:ext cx="1461695" cy="3341325"/>
-          </a:xfrm>
-          <a:prstGeom prst="ellipse">
-            <a:avLst/>
-          </a:prstGeom>
-          <a:solidFill>
-            <a:schemeClr val="accent1">
-              <a:lumMod val="60000"/>
-              <a:lumOff val="40000"/>
-            </a:schemeClr>
-          </a:solidFill>
-          <a:ln>
-            <a:solidFill>
-              <a:schemeClr val="accent1"/>
-            </a:solidFill>
-          </a:ln>
-        </p:spPr>
-      </p:sp>
-      <p:sp>
-        <p:nvSpPr>
-          <p:cNvPr id="10" name="Shape 8"/>
-          <p:cNvSpPr/>
-          <p:nvPr/>
-        </p:nvSpPr>
-        <p:spPr>
-          <a:xfrm>
-            <a:off x="-5944" y="3957828"/>
-            <a:ext cx="12191695" cy="2880360"/>
-          </a:xfrm>
-          <a:prstGeom prst="rect">
-            <a:avLst/>
-          </a:prstGeom>
-          <a:solidFill>
-            <a:srgbClr val="FBF7F2"/>
-          </a:solidFill>
-          <a:ln/>
-        </p:spPr>
-      </p:sp>
-    </p:spTree>
-    <p:extLst>
-      <p:ext uri="{BB962C8B-B14F-4D97-AF65-F5344CB8AC3E}">
-        <p14:creationId xmlns:p14="http://schemas.microsoft.com/office/powerpoint/2010/main" val="1021703097"/>
-      </p:ext>
-    </p:extLst>
-  </p:cSld>
-  <p:clrMapOvr>
-    <a:masterClrMapping/>
-  </p:clrMapOvr>
-</p:sld>
-</file>
-
-<file path=ppt/slides/slide26.xml><?xml version="1.0" encoding="utf-8"?>
-<p:sld xmlns:a="http://schemas.openxmlformats.org/drawingml/2006/main" xmlns:r="http://schemas.openxmlformats.org/officeDocument/2006/relationships" xmlns:p="http://schemas.openxmlformats.org/presentationml/2006/main">
   <p:cSld name="Slide 25">
     <p:bg>
       <p:bgPr>
@@ -18551,476 +17232,496 @@
           </a:p>
         </p:txBody>
       </p:sp>
-      <p:sp>
-        <p:nvSpPr>
-          <p:cNvPr id="30" name="Oval 29"/>
-          <p:cNvSpPr/>
-          <p:nvPr/>
-        </p:nvSpPr>
-        <p:spPr>
-          <a:xfrm>
-            <a:off x="1589382" y="3125724"/>
-            <a:ext cx="819680" cy="2560320"/>
-          </a:xfrm>
-          <a:prstGeom prst="ellipse">
-            <a:avLst/>
-          </a:prstGeom>
-          <a:solidFill>
-            <a:srgbClr val="8AA08C">
-              <a:alpha val="82000"/>
-            </a:srgbClr>
-          </a:solidFill>
-          <a:ln w="12700">
+      <p:grpSp>
+        <p:nvGrpSpPr>
+          <p:cNvPr id="4" name="群組 3"/>
+          <p:cNvGrpSpPr/>
+          <p:nvPr/>
+        </p:nvGrpSpPr>
+        <p:grpSpPr>
+          <a:xfrm>
+            <a:off x="1589382" y="2145075"/>
+            <a:ext cx="3222035" cy="3540969"/>
+            <a:chOff x="1589382" y="2145075"/>
+            <a:chExt cx="3222035" cy="3540969"/>
+          </a:xfrm>
+        </p:grpSpPr>
+        <p:sp>
+          <p:nvSpPr>
+            <p:cNvPr id="30" name="Oval 29"/>
+            <p:cNvSpPr/>
+            <p:nvPr/>
+          </p:nvSpPr>
+          <p:spPr>
+            <a:xfrm>
+              <a:off x="1589382" y="3125724"/>
+              <a:ext cx="819680" cy="2560320"/>
+            </a:xfrm>
+            <a:prstGeom prst="ellipse">
+              <a:avLst/>
+            </a:prstGeom>
             <a:solidFill>
-              <a:srgbClr val="60765C"/>
+              <a:srgbClr val="8AA08C"/>
             </a:solidFill>
-          </a:ln>
-        </p:spPr>
-        <p:style>
-          <a:lnRef idx="1">
-            <a:schemeClr val="accent1"/>
-          </a:lnRef>
-          <a:fillRef idx="3">
-            <a:schemeClr val="accent1"/>
-          </a:fillRef>
-          <a:effectRef idx="2">
-            <a:schemeClr val="accent1"/>
-          </a:effectRef>
-          <a:fontRef idx="minor">
-            <a:schemeClr val="lt1"/>
-          </a:fontRef>
-        </p:style>
-        <p:txBody>
-          <a:bodyPr rtlCol="0" anchor="ctr"/>
-          <a:lstStyle/>
-          <a:p>
-            <a:pPr algn="ctr"/>
-          </a:p>
-        </p:txBody>
-      </p:sp>
-      <p:sp>
-        <p:nvSpPr>
-          <p:cNvPr id="31" name="Oval 30"/>
-          <p:cNvSpPr/>
-          <p:nvPr/>
-        </p:nvSpPr>
-        <p:spPr>
-          <a:xfrm>
-            <a:off x="3884467" y="3075792"/>
-            <a:ext cx="926950" cy="2560320"/>
-          </a:xfrm>
-          <a:prstGeom prst="ellipse">
-            <a:avLst/>
-          </a:prstGeom>
-          <a:solidFill>
-            <a:srgbClr val="8AA08C">
-              <a:alpha val="82000"/>
-            </a:srgbClr>
-          </a:solidFill>
-          <a:ln w="12700">
+            <a:ln w="12700">
+              <a:solidFill>
+                <a:srgbClr val="60765C"/>
+              </a:solidFill>
+            </a:ln>
+          </p:spPr>
+          <p:style>
+            <a:lnRef idx="1">
+              <a:schemeClr val="accent1"/>
+            </a:lnRef>
+            <a:fillRef idx="3">
+              <a:schemeClr val="accent1"/>
+            </a:fillRef>
+            <a:effectRef idx="2">
+              <a:schemeClr val="accent1"/>
+            </a:effectRef>
+            <a:fontRef idx="minor">
+              <a:schemeClr val="lt1"/>
+            </a:fontRef>
+          </p:style>
+          <p:txBody>
+            <a:bodyPr rtlCol="0" anchor="ctr"/>
+            <a:lstStyle/>
+            <a:p>
+              <a:pPr algn="ctr"/>
+              <a:endParaRPr/>
+            </a:p>
+          </p:txBody>
+        </p:sp>
+        <p:sp>
+          <p:nvSpPr>
+            <p:cNvPr id="31" name="Oval 30"/>
+            <p:cNvSpPr/>
+            <p:nvPr/>
+          </p:nvSpPr>
+          <p:spPr>
+            <a:xfrm>
+              <a:off x="3884467" y="3075792"/>
+              <a:ext cx="926950" cy="2560320"/>
+            </a:xfrm>
+            <a:prstGeom prst="ellipse">
+              <a:avLst/>
+            </a:prstGeom>
             <a:solidFill>
-              <a:srgbClr val="60765C"/>
+              <a:srgbClr val="8AA08C"/>
             </a:solidFill>
-          </a:ln>
-        </p:spPr>
-        <p:style>
-          <a:lnRef idx="1">
-            <a:schemeClr val="accent1"/>
-          </a:lnRef>
-          <a:fillRef idx="3">
-            <a:schemeClr val="accent1"/>
-          </a:fillRef>
-          <a:effectRef idx="2">
-            <a:schemeClr val="accent1"/>
-          </a:effectRef>
-          <a:fontRef idx="minor">
-            <a:schemeClr val="lt1"/>
-          </a:fontRef>
-        </p:style>
-        <p:txBody>
-          <a:bodyPr rtlCol="0" anchor="ctr"/>
-          <a:lstStyle/>
-          <a:p>
-            <a:pPr algn="ctr"/>
-          </a:p>
-        </p:txBody>
-      </p:sp>
-      <p:sp>
-        <p:nvSpPr>
-          <p:cNvPr id="32" name="Oval 31"/>
-          <p:cNvSpPr/>
-          <p:nvPr/>
-        </p:nvSpPr>
-        <p:spPr>
-          <a:xfrm>
-            <a:off x="3483777" y="2807207"/>
-            <a:ext cx="938910" cy="2679192"/>
-          </a:xfrm>
-          <a:prstGeom prst="ellipse">
-            <a:avLst/>
-          </a:prstGeom>
-          <a:solidFill>
-            <a:srgbClr val="8AA08C">
-              <a:alpha val="82000"/>
-            </a:srgbClr>
-          </a:solidFill>
-          <a:ln w="12700">
+            <a:ln w="12700">
+              <a:solidFill>
+                <a:srgbClr val="60765C"/>
+              </a:solidFill>
+            </a:ln>
+          </p:spPr>
+          <p:style>
+            <a:lnRef idx="1">
+              <a:schemeClr val="accent1"/>
+            </a:lnRef>
+            <a:fillRef idx="3">
+              <a:schemeClr val="accent1"/>
+            </a:fillRef>
+            <a:effectRef idx="2">
+              <a:schemeClr val="accent1"/>
+            </a:effectRef>
+            <a:fontRef idx="minor">
+              <a:schemeClr val="lt1"/>
+            </a:fontRef>
+          </p:style>
+          <p:txBody>
+            <a:bodyPr rtlCol="0" anchor="ctr"/>
+            <a:lstStyle/>
+            <a:p>
+              <a:pPr algn="ctr"/>
+              <a:endParaRPr/>
+            </a:p>
+          </p:txBody>
+        </p:sp>
+        <p:sp>
+          <p:nvSpPr>
+            <p:cNvPr id="32" name="Oval 31"/>
+            <p:cNvSpPr/>
+            <p:nvPr/>
+          </p:nvSpPr>
+          <p:spPr>
+            <a:xfrm>
+              <a:off x="3483777" y="2807207"/>
+              <a:ext cx="938910" cy="2679192"/>
+            </a:xfrm>
+            <a:prstGeom prst="ellipse">
+              <a:avLst/>
+            </a:prstGeom>
             <a:solidFill>
-              <a:srgbClr val="60765C"/>
+              <a:srgbClr val="8AA08C"/>
             </a:solidFill>
-          </a:ln>
-        </p:spPr>
-        <p:style>
-          <a:lnRef idx="1">
-            <a:schemeClr val="accent1"/>
-          </a:lnRef>
-          <a:fillRef idx="3">
-            <a:schemeClr val="accent1"/>
-          </a:fillRef>
-          <a:effectRef idx="2">
-            <a:schemeClr val="accent1"/>
-          </a:effectRef>
-          <a:fontRef idx="minor">
-            <a:schemeClr val="lt1"/>
-          </a:fontRef>
-        </p:style>
-        <p:txBody>
-          <a:bodyPr rtlCol="0" anchor="ctr"/>
-          <a:lstStyle/>
-          <a:p>
-            <a:pPr algn="ctr"/>
-          </a:p>
-        </p:txBody>
-      </p:sp>
-      <p:sp>
-        <p:nvSpPr>
-          <p:cNvPr id="33" name="Oval 32"/>
-          <p:cNvSpPr/>
-          <p:nvPr/>
-        </p:nvSpPr>
-        <p:spPr>
-          <a:xfrm>
-            <a:off x="1918020" y="2824734"/>
-            <a:ext cx="991945" cy="2679192"/>
-          </a:xfrm>
-          <a:prstGeom prst="ellipse">
-            <a:avLst/>
-          </a:prstGeom>
-          <a:solidFill>
-            <a:srgbClr val="8AA08C">
-              <a:alpha val="82000"/>
-            </a:srgbClr>
-          </a:solidFill>
-          <a:ln w="12700">
+            <a:ln w="12700">
+              <a:solidFill>
+                <a:srgbClr val="60765C"/>
+              </a:solidFill>
+            </a:ln>
+          </p:spPr>
+          <p:style>
+            <a:lnRef idx="1">
+              <a:schemeClr val="accent1"/>
+            </a:lnRef>
+            <a:fillRef idx="3">
+              <a:schemeClr val="accent1"/>
+            </a:fillRef>
+            <a:effectRef idx="2">
+              <a:schemeClr val="accent1"/>
+            </a:effectRef>
+            <a:fontRef idx="minor">
+              <a:schemeClr val="lt1"/>
+            </a:fontRef>
+          </p:style>
+          <p:txBody>
+            <a:bodyPr rtlCol="0" anchor="ctr"/>
+            <a:lstStyle/>
+            <a:p>
+              <a:pPr algn="ctr"/>
+              <a:endParaRPr/>
+            </a:p>
+          </p:txBody>
+        </p:sp>
+        <p:sp>
+          <p:nvSpPr>
+            <p:cNvPr id="33" name="Oval 32"/>
+            <p:cNvSpPr/>
+            <p:nvPr/>
+          </p:nvSpPr>
+          <p:spPr>
+            <a:xfrm>
+              <a:off x="1918020" y="2824734"/>
+              <a:ext cx="991945" cy="2679192"/>
+            </a:xfrm>
+            <a:prstGeom prst="ellipse">
+              <a:avLst/>
+            </a:prstGeom>
             <a:solidFill>
-              <a:srgbClr val="60765C"/>
+              <a:srgbClr val="8AA08C"/>
             </a:solidFill>
-          </a:ln>
-        </p:spPr>
-        <p:style>
-          <a:lnRef idx="1">
-            <a:schemeClr val="accent1"/>
-          </a:lnRef>
-          <a:fillRef idx="3">
-            <a:schemeClr val="accent1"/>
-          </a:fillRef>
-          <a:effectRef idx="2">
-            <a:schemeClr val="accent1"/>
-          </a:effectRef>
-          <a:fontRef idx="minor">
-            <a:schemeClr val="lt1"/>
-          </a:fontRef>
-        </p:style>
-        <p:txBody>
-          <a:bodyPr rtlCol="0" anchor="ctr"/>
-          <a:lstStyle/>
-          <a:p>
-            <a:pPr algn="ctr"/>
-          </a:p>
-        </p:txBody>
-      </p:sp>
-      <p:sp>
-        <p:nvSpPr>
-          <p:cNvPr id="34" name="Oval 33"/>
-          <p:cNvSpPr/>
-          <p:nvPr/>
-        </p:nvSpPr>
-        <p:spPr>
-          <a:xfrm>
-            <a:off x="2422957" y="2145075"/>
-            <a:ext cx="1461695" cy="3341325"/>
-          </a:xfrm>
-          <a:prstGeom prst="ellipse">
-            <a:avLst/>
-          </a:prstGeom>
-          <a:solidFill>
-            <a:srgbClr val="8AA08C">
-              <a:alpha val="82000"/>
-            </a:srgbClr>
-          </a:solidFill>
-          <a:ln w="12700">
+            <a:ln w="12700">
+              <a:solidFill>
+                <a:srgbClr val="60765C"/>
+              </a:solidFill>
+            </a:ln>
+          </p:spPr>
+          <p:style>
+            <a:lnRef idx="1">
+              <a:schemeClr val="accent1"/>
+            </a:lnRef>
+            <a:fillRef idx="3">
+              <a:schemeClr val="accent1"/>
+            </a:fillRef>
+            <a:effectRef idx="2">
+              <a:schemeClr val="accent1"/>
+            </a:effectRef>
+            <a:fontRef idx="minor">
+              <a:schemeClr val="lt1"/>
+            </a:fontRef>
+          </p:style>
+          <p:txBody>
+            <a:bodyPr rtlCol="0" anchor="ctr"/>
+            <a:lstStyle/>
+            <a:p>
+              <a:pPr algn="ctr"/>
+              <a:endParaRPr/>
+            </a:p>
+          </p:txBody>
+        </p:sp>
+        <p:sp>
+          <p:nvSpPr>
+            <p:cNvPr id="34" name="Oval 33"/>
+            <p:cNvSpPr/>
+            <p:nvPr/>
+          </p:nvSpPr>
+          <p:spPr>
+            <a:xfrm>
+              <a:off x="2422957" y="2145075"/>
+              <a:ext cx="1461695" cy="3341325"/>
+            </a:xfrm>
+            <a:prstGeom prst="ellipse">
+              <a:avLst/>
+            </a:prstGeom>
             <a:solidFill>
-              <a:srgbClr val="60765C"/>
+              <a:srgbClr val="8AA08C"/>
             </a:solidFill>
-          </a:ln>
-        </p:spPr>
-        <p:style>
-          <a:lnRef idx="1">
-            <a:schemeClr val="accent1"/>
-          </a:lnRef>
-          <a:fillRef idx="3">
-            <a:schemeClr val="accent1"/>
-          </a:fillRef>
-          <a:effectRef idx="2">
-            <a:schemeClr val="accent1"/>
-          </a:effectRef>
-          <a:fontRef idx="minor">
-            <a:schemeClr val="lt1"/>
-          </a:fontRef>
-        </p:style>
-        <p:txBody>
-          <a:bodyPr rtlCol="0" anchor="ctr"/>
-          <a:lstStyle/>
-          <a:p>
-            <a:pPr algn="ctr"/>
-          </a:p>
-        </p:txBody>
-      </p:sp>
-      <p:sp>
-        <p:nvSpPr>
-          <p:cNvPr id="35" name="Oval 34"/>
-          <p:cNvSpPr/>
-          <p:nvPr/>
-        </p:nvSpPr>
-        <p:spPr>
-          <a:xfrm>
-            <a:off x="6801462" y="3125724"/>
-            <a:ext cx="819680" cy="2560320"/>
-          </a:xfrm>
-          <a:prstGeom prst="ellipse">
-            <a:avLst/>
-          </a:prstGeom>
-          <a:solidFill>
-            <a:srgbClr val="5A4038">
-              <a:alpha val="88000"/>
-            </a:srgbClr>
-          </a:solidFill>
-          <a:ln w="12700">
+            <a:ln w="12700">
+              <a:solidFill>
+                <a:srgbClr val="60765C"/>
+              </a:solidFill>
+            </a:ln>
+          </p:spPr>
+          <p:style>
+            <a:lnRef idx="1">
+              <a:schemeClr val="accent1"/>
+            </a:lnRef>
+            <a:fillRef idx="3">
+              <a:schemeClr val="accent1"/>
+            </a:fillRef>
+            <a:effectRef idx="2">
+              <a:schemeClr val="accent1"/>
+            </a:effectRef>
+            <a:fontRef idx="minor">
+              <a:schemeClr val="lt1"/>
+            </a:fontRef>
+          </p:style>
+          <p:txBody>
+            <a:bodyPr rtlCol="0" anchor="ctr"/>
+            <a:lstStyle/>
+            <a:p>
+              <a:pPr algn="ctr"/>
+              <a:endParaRPr/>
+            </a:p>
+          </p:txBody>
+        </p:sp>
+      </p:grpSp>
+      <p:grpSp>
+        <p:nvGrpSpPr>
+          <p:cNvPr id="5" name="群組 4"/>
+          <p:cNvGrpSpPr/>
+          <p:nvPr/>
+        </p:nvGrpSpPr>
+        <p:grpSpPr>
+          <a:xfrm>
+            <a:off x="6801462" y="2145075"/>
+            <a:ext cx="3222035" cy="3540969"/>
+            <a:chOff x="6801462" y="2145075"/>
+            <a:chExt cx="3222035" cy="3540969"/>
+          </a:xfrm>
+        </p:grpSpPr>
+        <p:sp>
+          <p:nvSpPr>
+            <p:cNvPr id="35" name="Oval 34"/>
+            <p:cNvSpPr/>
+            <p:nvPr/>
+          </p:nvSpPr>
+          <p:spPr>
+            <a:xfrm>
+              <a:off x="6801462" y="3125724"/>
+              <a:ext cx="819680" cy="2560320"/>
+            </a:xfrm>
+            <a:prstGeom prst="ellipse">
+              <a:avLst/>
+            </a:prstGeom>
             <a:solidFill>
-              <a:srgbClr val="8A6A5C"/>
+              <a:srgbClr val="5A4038"/>
             </a:solidFill>
-          </a:ln>
-        </p:spPr>
-        <p:style>
-          <a:lnRef idx="1">
-            <a:schemeClr val="accent1"/>
-          </a:lnRef>
-          <a:fillRef idx="3">
-            <a:schemeClr val="accent1"/>
-          </a:fillRef>
-          <a:effectRef idx="2">
-            <a:schemeClr val="accent1"/>
-          </a:effectRef>
-          <a:fontRef idx="minor">
-            <a:schemeClr val="lt1"/>
-          </a:fontRef>
-        </p:style>
-        <p:txBody>
-          <a:bodyPr rtlCol="0" anchor="ctr"/>
-          <a:lstStyle/>
-          <a:p>
-            <a:pPr algn="ctr"/>
-          </a:p>
-        </p:txBody>
-      </p:sp>
-      <p:sp>
-        <p:nvSpPr>
-          <p:cNvPr id="36" name="Oval 35"/>
-          <p:cNvSpPr/>
-          <p:nvPr/>
-        </p:nvSpPr>
-        <p:spPr>
-          <a:xfrm>
-            <a:off x="9096547" y="3075792"/>
-            <a:ext cx="926950" cy="2560320"/>
-          </a:xfrm>
-          <a:prstGeom prst="ellipse">
-            <a:avLst/>
-          </a:prstGeom>
-          <a:solidFill>
-            <a:srgbClr val="5A4038">
-              <a:alpha val="88000"/>
-            </a:srgbClr>
-          </a:solidFill>
-          <a:ln w="12700">
+            <a:ln w="12700">
+              <a:solidFill>
+                <a:srgbClr val="8A6A5C"/>
+              </a:solidFill>
+            </a:ln>
+          </p:spPr>
+          <p:style>
+            <a:lnRef idx="1">
+              <a:schemeClr val="accent1"/>
+            </a:lnRef>
+            <a:fillRef idx="3">
+              <a:schemeClr val="accent1"/>
+            </a:fillRef>
+            <a:effectRef idx="2">
+              <a:schemeClr val="accent1"/>
+            </a:effectRef>
+            <a:fontRef idx="minor">
+              <a:schemeClr val="lt1"/>
+            </a:fontRef>
+          </p:style>
+          <p:txBody>
+            <a:bodyPr rtlCol="0" anchor="ctr"/>
+            <a:lstStyle/>
+            <a:p>
+              <a:pPr algn="ctr"/>
+              <a:endParaRPr/>
+            </a:p>
+          </p:txBody>
+        </p:sp>
+        <p:sp>
+          <p:nvSpPr>
+            <p:cNvPr id="36" name="Oval 35"/>
+            <p:cNvSpPr/>
+            <p:nvPr/>
+          </p:nvSpPr>
+          <p:spPr>
+            <a:xfrm>
+              <a:off x="9096547" y="3075792"/>
+              <a:ext cx="926950" cy="2560320"/>
+            </a:xfrm>
+            <a:prstGeom prst="ellipse">
+              <a:avLst/>
+            </a:prstGeom>
             <a:solidFill>
-              <a:srgbClr val="8A6A5C"/>
+              <a:srgbClr val="5A4038"/>
             </a:solidFill>
-          </a:ln>
-        </p:spPr>
-        <p:style>
-          <a:lnRef idx="1">
-            <a:schemeClr val="accent1"/>
-          </a:lnRef>
-          <a:fillRef idx="3">
-            <a:schemeClr val="accent1"/>
-          </a:fillRef>
-          <a:effectRef idx="2">
-            <a:schemeClr val="accent1"/>
-          </a:effectRef>
-          <a:fontRef idx="minor">
-            <a:schemeClr val="lt1"/>
-          </a:fontRef>
-        </p:style>
-        <p:txBody>
-          <a:bodyPr rtlCol="0" anchor="ctr"/>
-          <a:lstStyle/>
-          <a:p>
-            <a:pPr algn="ctr"/>
-          </a:p>
-        </p:txBody>
-      </p:sp>
-      <p:sp>
-        <p:nvSpPr>
-          <p:cNvPr id="37" name="Oval 36"/>
-          <p:cNvSpPr/>
-          <p:nvPr/>
-        </p:nvSpPr>
-        <p:spPr>
-          <a:xfrm>
-            <a:off x="8695857" y="2807207"/>
-            <a:ext cx="938910" cy="2679192"/>
-          </a:xfrm>
-          <a:prstGeom prst="ellipse">
-            <a:avLst/>
-          </a:prstGeom>
-          <a:solidFill>
-            <a:srgbClr val="5A4038">
-              <a:alpha val="88000"/>
-            </a:srgbClr>
-          </a:solidFill>
-          <a:ln w="12700">
+            <a:ln w="12700">
+              <a:solidFill>
+                <a:srgbClr val="8A6A5C"/>
+              </a:solidFill>
+            </a:ln>
+          </p:spPr>
+          <p:style>
+            <a:lnRef idx="1">
+              <a:schemeClr val="accent1"/>
+            </a:lnRef>
+            <a:fillRef idx="3">
+              <a:schemeClr val="accent1"/>
+            </a:fillRef>
+            <a:effectRef idx="2">
+              <a:schemeClr val="accent1"/>
+            </a:effectRef>
+            <a:fontRef idx="minor">
+              <a:schemeClr val="lt1"/>
+            </a:fontRef>
+          </p:style>
+          <p:txBody>
+            <a:bodyPr rtlCol="0" anchor="ctr"/>
+            <a:lstStyle/>
+            <a:p>
+              <a:pPr algn="ctr"/>
+              <a:endParaRPr/>
+            </a:p>
+          </p:txBody>
+        </p:sp>
+        <p:sp>
+          <p:nvSpPr>
+            <p:cNvPr id="37" name="Oval 36"/>
+            <p:cNvSpPr/>
+            <p:nvPr/>
+          </p:nvSpPr>
+          <p:spPr>
+            <a:xfrm>
+              <a:off x="8695857" y="2807207"/>
+              <a:ext cx="938910" cy="2679192"/>
+            </a:xfrm>
+            <a:prstGeom prst="ellipse">
+              <a:avLst/>
+            </a:prstGeom>
             <a:solidFill>
-              <a:srgbClr val="8A6A5C"/>
+              <a:srgbClr val="5A4038"/>
             </a:solidFill>
-          </a:ln>
-        </p:spPr>
-        <p:style>
-          <a:lnRef idx="1">
-            <a:schemeClr val="accent1"/>
-          </a:lnRef>
-          <a:fillRef idx="3">
-            <a:schemeClr val="accent1"/>
-          </a:fillRef>
-          <a:effectRef idx="2">
-            <a:schemeClr val="accent1"/>
-          </a:effectRef>
-          <a:fontRef idx="minor">
-            <a:schemeClr val="lt1"/>
-          </a:fontRef>
-        </p:style>
-        <p:txBody>
-          <a:bodyPr rtlCol="0" anchor="ctr"/>
-          <a:lstStyle/>
-          <a:p>
-            <a:pPr algn="ctr"/>
-          </a:p>
-        </p:txBody>
-      </p:sp>
-      <p:sp>
-        <p:nvSpPr>
-          <p:cNvPr id="38" name="Oval 37"/>
-          <p:cNvSpPr/>
-          <p:nvPr/>
-        </p:nvSpPr>
-        <p:spPr>
-          <a:xfrm>
-            <a:off x="7130100" y="2824734"/>
-            <a:ext cx="991945" cy="2679192"/>
-          </a:xfrm>
-          <a:prstGeom prst="ellipse">
-            <a:avLst/>
-          </a:prstGeom>
-          <a:solidFill>
-            <a:srgbClr val="5A4038">
-              <a:alpha val="88000"/>
-            </a:srgbClr>
-          </a:solidFill>
-          <a:ln w="12700">
+            <a:ln w="12700">
+              <a:solidFill>
+                <a:srgbClr val="8A6A5C"/>
+              </a:solidFill>
+            </a:ln>
+          </p:spPr>
+          <p:style>
+            <a:lnRef idx="1">
+              <a:schemeClr val="accent1"/>
+            </a:lnRef>
+            <a:fillRef idx="3">
+              <a:schemeClr val="accent1"/>
+            </a:fillRef>
+            <a:effectRef idx="2">
+              <a:schemeClr val="accent1"/>
+            </a:effectRef>
+            <a:fontRef idx="minor">
+              <a:schemeClr val="lt1"/>
+            </a:fontRef>
+          </p:style>
+          <p:txBody>
+            <a:bodyPr rtlCol="0" anchor="ctr"/>
+            <a:lstStyle/>
+            <a:p>
+              <a:pPr algn="ctr"/>
+              <a:endParaRPr/>
+            </a:p>
+          </p:txBody>
+        </p:sp>
+        <p:sp>
+          <p:nvSpPr>
+            <p:cNvPr id="38" name="Oval 37"/>
+            <p:cNvSpPr/>
+            <p:nvPr/>
+          </p:nvSpPr>
+          <p:spPr>
+            <a:xfrm>
+              <a:off x="7130100" y="2824734"/>
+              <a:ext cx="991945" cy="2679192"/>
+            </a:xfrm>
+            <a:prstGeom prst="ellipse">
+              <a:avLst/>
+            </a:prstGeom>
             <a:solidFill>
-              <a:srgbClr val="8A6A5C"/>
+              <a:srgbClr val="5A4038"/>
             </a:solidFill>
-          </a:ln>
-        </p:spPr>
-        <p:style>
-          <a:lnRef idx="1">
-            <a:schemeClr val="accent1"/>
-          </a:lnRef>
-          <a:fillRef idx="3">
-            <a:schemeClr val="accent1"/>
-          </a:fillRef>
-          <a:effectRef idx="2">
-            <a:schemeClr val="accent1"/>
-          </a:effectRef>
-          <a:fontRef idx="minor">
-            <a:schemeClr val="lt1"/>
-          </a:fontRef>
-        </p:style>
-        <p:txBody>
-          <a:bodyPr rtlCol="0" anchor="ctr"/>
-          <a:lstStyle/>
-          <a:p>
-            <a:pPr algn="ctr"/>
-          </a:p>
-        </p:txBody>
-      </p:sp>
-      <p:sp>
-        <p:nvSpPr>
-          <p:cNvPr id="39" name="Oval 38"/>
-          <p:cNvSpPr/>
-          <p:nvPr/>
-        </p:nvSpPr>
-        <p:spPr>
-          <a:xfrm>
-            <a:off x="7635037" y="2145075"/>
-            <a:ext cx="1461695" cy="3341325"/>
-          </a:xfrm>
-          <a:prstGeom prst="ellipse">
-            <a:avLst/>
-          </a:prstGeom>
-          <a:solidFill>
-            <a:srgbClr val="5A4038">
-              <a:alpha val="88000"/>
-            </a:srgbClr>
-          </a:solidFill>
-          <a:ln w="12700">
+            <a:ln w="12700">
+              <a:solidFill>
+                <a:srgbClr val="8A6A5C"/>
+              </a:solidFill>
+            </a:ln>
+          </p:spPr>
+          <p:style>
+            <a:lnRef idx="1">
+              <a:schemeClr val="accent1"/>
+            </a:lnRef>
+            <a:fillRef idx="3">
+              <a:schemeClr val="accent1"/>
+            </a:fillRef>
+            <a:effectRef idx="2">
+              <a:schemeClr val="accent1"/>
+            </a:effectRef>
+            <a:fontRef idx="minor">
+              <a:schemeClr val="lt1"/>
+            </a:fontRef>
+          </p:style>
+          <p:txBody>
+            <a:bodyPr rtlCol="0" anchor="ctr"/>
+            <a:lstStyle/>
+            <a:p>
+              <a:pPr algn="ctr"/>
+              <a:endParaRPr/>
+            </a:p>
+          </p:txBody>
+        </p:sp>
+        <p:sp>
+          <p:nvSpPr>
+            <p:cNvPr id="39" name="Oval 38"/>
+            <p:cNvSpPr/>
+            <p:nvPr/>
+          </p:nvSpPr>
+          <p:spPr>
+            <a:xfrm>
+              <a:off x="7635037" y="2145075"/>
+              <a:ext cx="1461695" cy="3341325"/>
+            </a:xfrm>
+            <a:prstGeom prst="ellipse">
+              <a:avLst/>
+            </a:prstGeom>
             <a:solidFill>
-              <a:srgbClr val="8A6A5C"/>
+              <a:srgbClr val="5A4038"/>
             </a:solidFill>
-          </a:ln>
-        </p:spPr>
-        <p:style>
-          <a:lnRef idx="1">
-            <a:schemeClr val="accent1"/>
-          </a:lnRef>
-          <a:fillRef idx="3">
-            <a:schemeClr val="accent1"/>
-          </a:fillRef>
-          <a:effectRef idx="2">
-            <a:schemeClr val="accent1"/>
-          </a:effectRef>
-          <a:fontRef idx="minor">
-            <a:schemeClr val="lt1"/>
-          </a:fontRef>
-        </p:style>
-        <p:txBody>
-          <a:bodyPr rtlCol="0" anchor="ctr"/>
-          <a:lstStyle/>
-          <a:p>
-            <a:pPr algn="ctr"/>
-          </a:p>
-        </p:txBody>
-      </p:sp>
+            <a:ln w="12700">
+              <a:solidFill>
+                <a:srgbClr val="8A6A5C"/>
+              </a:solidFill>
+            </a:ln>
+          </p:spPr>
+          <p:style>
+            <a:lnRef idx="1">
+              <a:schemeClr val="accent1"/>
+            </a:lnRef>
+            <a:fillRef idx="3">
+              <a:schemeClr val="accent1"/>
+            </a:fillRef>
+            <a:effectRef idx="2">
+              <a:schemeClr val="accent1"/>
+            </a:effectRef>
+            <a:fontRef idx="minor">
+              <a:schemeClr val="lt1"/>
+            </a:fontRef>
+          </p:style>
+          <p:txBody>
+            <a:bodyPr rtlCol="0" anchor="ctr"/>
+            <a:lstStyle/>
+            <a:p>
+              <a:pPr algn="ctr"/>
+              <a:endParaRPr/>
+            </a:p>
+          </p:txBody>
+        </p:sp>
+      </p:grpSp>
       <p:sp>
         <p:nvSpPr>
           <p:cNvPr id="7" name="Shape 5"/>
@@ -19901,7 +18602,7 @@
           <a:noFill/>
         </p:spPr>
         <p:txBody>
-          <a:bodyPr wrap="square" lIns="0" rIns="0" tIns="0" bIns="0">
+          <a:bodyPr wrap="square" lIns="0" tIns="0" rIns="0" bIns="0">
             <a:spAutoFit/>
           </a:bodyPr>
           <a:lstStyle/>
@@ -19927,7 +18628,7 @@
 </p:sld>
 </file>
 
-<file path=ppt/slides/slide27.xml><?xml version="1.0" encoding="utf-8"?>
+<file path=ppt/slides/slide26.xml><?xml version="1.0" encoding="utf-8"?>
 <p:sld xmlns:a="http://schemas.openxmlformats.org/drawingml/2006/main" xmlns:r="http://schemas.openxmlformats.org/officeDocument/2006/relationships" xmlns:p="http://schemas.openxmlformats.org/presentationml/2006/main">
   <p:cSld name="Slide 26">
     <p:bg>
@@ -20117,7 +18818,7 @@
 </p:sld>
 </file>
 
-<file path=ppt/slides/slide28.xml><?xml version="1.0" encoding="utf-8"?>
+<file path=ppt/slides/slide27.xml><?xml version="1.0" encoding="utf-8"?>
 <p:sld xmlns:a="http://schemas.openxmlformats.org/drawingml/2006/main" xmlns:r="http://schemas.openxmlformats.org/officeDocument/2006/relationships" xmlns:p="http://schemas.openxmlformats.org/presentationml/2006/main">
   <p:cSld name="Slide 27">
     <p:bg>
@@ -21618,7 +20319,7 @@
 </p:sld>
 </file>
 
-<file path=ppt/slides/slide29.xml><?xml version="1.0" encoding="utf-8"?>
+<file path=ppt/slides/slide28.xml><?xml version="1.0" encoding="utf-8"?>
 <p:sld xmlns:a="http://schemas.openxmlformats.org/drawingml/2006/main" xmlns:r="http://schemas.openxmlformats.org/officeDocument/2006/relationships" xmlns:p="http://schemas.openxmlformats.org/presentationml/2006/main">
   <p:cSld name="Slide 28">
     <p:bg>
@@ -22498,6 +21199,325 @@
               <a:t>哪個佔的頻寬大？哪個比較高（訊號強）？兩台靠太近會怎樣？——高度看功率、寬度看 W/N，兩件事互不相干；這正是判斷「同一個頻段裡有幾台、各是什麼設定」的基本功。</a:t>
             </a:r>
             <a:endParaRPr lang="en-US" sz="1400" dirty="0"/>
+          </a:p>
+        </p:txBody>
+      </p:sp>
+    </p:spTree>
+  </p:cSld>
+  <p:clrMapOvr>
+    <a:masterClrMapping/>
+  </p:clrMapOvr>
+</p:sld>
+</file>
+
+<file path=ppt/slides/slide29.xml><?xml version="1.0" encoding="utf-8"?>
+<p:sld xmlns:a="http://schemas.openxmlformats.org/drawingml/2006/main" xmlns:r="http://schemas.openxmlformats.org/officeDocument/2006/relationships" xmlns:p="http://schemas.openxmlformats.org/presentationml/2006/main">
+  <p:cSld name="Slide 30">
+    <p:bg>
+      <p:bgPr>
+        <a:solidFill>
+          <a:srgbClr val="43312A"/>
+        </a:solidFill>
+        <a:effectLst/>
+      </p:bgPr>
+    </p:bg>
+    <p:spTree>
+      <p:nvGrpSpPr>
+        <p:cNvPr id="1" name=""/>
+        <p:cNvGrpSpPr/>
+        <p:nvPr/>
+      </p:nvGrpSpPr>
+      <p:grpSpPr>
+        <a:xfrm>
+          <a:off x="0" y="0"/>
+          <a:ext cx="0" cy="0"/>
+          <a:chOff x="0" y="0"/>
+          <a:chExt cx="0" cy="0"/>
+        </a:xfrm>
+      </p:grpSpPr>
+      <p:sp>
+        <p:nvSpPr>
+          <p:cNvPr id="2" name="Shape 0"/>
+          <p:cNvSpPr/>
+          <p:nvPr/>
+        </p:nvSpPr>
+        <p:spPr>
+          <a:xfrm>
+            <a:off x="-1463040" y="-1463040"/>
+            <a:ext cx="3840480" cy="3840480"/>
+          </a:xfrm>
+          <a:prstGeom prst="ellipse">
+            <a:avLst/>
+          </a:prstGeom>
+          <a:solidFill>
+            <a:srgbClr val="5A4038"/>
+          </a:solidFill>
+          <a:ln/>
+        </p:spPr>
+      </p:sp>
+      <p:sp>
+        <p:nvSpPr>
+          <p:cNvPr id="3" name="Shape 1"/>
+          <p:cNvSpPr/>
+          <p:nvPr/>
+        </p:nvSpPr>
+        <p:spPr>
+          <a:xfrm>
+            <a:off x="10058400" y="4572000"/>
+            <a:ext cx="4206240" cy="4206240"/>
+          </a:xfrm>
+          <a:prstGeom prst="ellipse">
+            <a:avLst/>
+          </a:prstGeom>
+          <a:solidFill>
+            <a:srgbClr val="3A2A23"/>
+          </a:solidFill>
+          <a:ln/>
+        </p:spPr>
+      </p:sp>
+      <p:sp>
+        <p:nvSpPr>
+          <p:cNvPr id="4" name="Text 2"/>
+          <p:cNvSpPr/>
+          <p:nvPr/>
+        </p:nvSpPr>
+        <p:spPr>
+          <a:xfrm>
+            <a:off x="1005840" y="1965960"/>
+            <a:ext cx="10058400" cy="457200"/>
+          </a:xfrm>
+          <a:prstGeom prst="rect">
+            <a:avLst/>
+          </a:prstGeom>
+          <a:noFill/>
+          <a:ln/>
+        </p:spPr>
+        <p:txBody>
+          <a:bodyPr wrap="square" rtlCol="0" anchor="ctr"/>
+          <a:lstStyle/>
+          <a:p>
+            <a:pPr marL="0" indent="0">
+              <a:buNone/>
+            </a:pPr>
+            <a:r>
+              <a:rPr lang="en-US" sz="1700" b="1" kern="0" spc="300" dirty="0">
+                <a:solidFill>
+                  <a:srgbClr val="D99A5B"/>
+                </a:solidFill>
+                <a:latin typeface="Calibri" pitchFamily="34" charset="0"/>
+                <a:ea typeface="Calibri" pitchFamily="34" charset="-122"/>
+                <a:cs typeface="Calibri" pitchFamily="34" charset="-120"/>
+              </a:rPr>
+              <a:t>SESSION 6</a:t>
+            </a:r>
+            <a:endParaRPr lang="en-US" sz="1700" dirty="0"/>
+          </a:p>
+        </p:txBody>
+      </p:sp>
+      <p:sp>
+        <p:nvSpPr>
+          <p:cNvPr id="5" name="Text 3"/>
+          <p:cNvSpPr/>
+          <p:nvPr/>
+        </p:nvSpPr>
+        <p:spPr>
+          <a:xfrm>
+            <a:off x="960120" y="2377440"/>
+            <a:ext cx="10241280" cy="1280160"/>
+          </a:xfrm>
+          <a:prstGeom prst="rect">
+            <a:avLst/>
+          </a:prstGeom>
+          <a:noFill/>
+          <a:ln/>
+        </p:spPr>
+        <p:txBody>
+          <a:bodyPr wrap="square" rtlCol="0" anchor="ctr"/>
+          <a:lstStyle/>
+          <a:p>
+            <a:pPr marL="0" indent="0">
+              <a:buNone/>
+            </a:pPr>
+            <a:r>
+              <a:rPr lang="en-US" sz="4600" b="1" dirty="0">
+                <a:solidFill>
+                  <a:srgbClr val="FBF7F2"/>
+                </a:solidFill>
+                <a:latin typeface="Cambria" pitchFamily="34" charset="0"/>
+                <a:ea typeface="Cambria" pitchFamily="34" charset="-122"/>
+                <a:cs typeface="Cambria" pitchFamily="34" charset="-120"/>
+              </a:rPr>
+              <a:t>亞音 CTCSS</a:t>
+            </a:r>
+            <a:endParaRPr lang="en-US" sz="4600" dirty="0"/>
+          </a:p>
+        </p:txBody>
+      </p:sp>
+      <p:sp>
+        <p:nvSpPr>
+          <p:cNvPr id="6" name="Text 4"/>
+          <p:cNvSpPr/>
+          <p:nvPr/>
+        </p:nvSpPr>
+        <p:spPr>
+          <a:xfrm>
+            <a:off x="1005840" y="3657600"/>
+            <a:ext cx="9875520" cy="548640"/>
+          </a:xfrm>
+          <a:prstGeom prst="rect">
+            <a:avLst/>
+          </a:prstGeom>
+          <a:noFill/>
+          <a:ln/>
+        </p:spPr>
+        <p:txBody>
+          <a:bodyPr wrap="square" rtlCol="0" anchor="ctr"/>
+          <a:lstStyle/>
+          <a:p>
+            <a:pPr marL="0" indent="0">
+              <a:buNone/>
+            </a:pPr>
+            <a:r>
+              <a:rPr lang="en-US" sz="1700" dirty="0">
+                <a:solidFill>
+                  <a:srgbClr val="D9C7B8"/>
+                </a:solidFill>
+                <a:latin typeface="Calibri" pitchFamily="34" charset="0"/>
+                <a:ea typeface="Calibri" pitchFamily="34" charset="-122"/>
+                <a:cs typeface="Calibri" pitchFamily="34" charset="-120"/>
+              </a:rPr>
+              <a:t>重點：亞音不是加密</a:t>
+            </a:r>
+            <a:endParaRPr lang="en-US" sz="1700" dirty="0"/>
+          </a:p>
+        </p:txBody>
+      </p:sp>
+      <p:sp>
+        <p:nvSpPr>
+          <p:cNvPr id="7" name="Shape 5"/>
+          <p:cNvSpPr/>
+          <p:nvPr/>
+        </p:nvSpPr>
+        <p:spPr>
+          <a:xfrm>
+            <a:off x="1005840" y="4480560"/>
+            <a:ext cx="9966960" cy="896112"/>
+          </a:xfrm>
+          <a:prstGeom prst="roundRect">
+            <a:avLst>
+              <a:gd name="adj" fmla="val 12245"/>
+            </a:avLst>
+          </a:prstGeom>
+          <a:solidFill>
+            <a:srgbClr val="3A2A23"/>
+          </a:solidFill>
+          <a:ln/>
+          <a:effectLst>
+            <a:outerShdw blurRad="114300" dist="50800" dir="5400000" algn="bl" rotWithShape="0">
+              <a:srgbClr val="6B4A3A">
+                <a:alpha val="28000"/>
+              </a:srgbClr>
+            </a:outerShdw>
+          </a:effectLst>
+        </p:spPr>
+      </p:sp>
+      <p:sp>
+        <p:nvSpPr>
+          <p:cNvPr id="8" name="Text 6"/>
+          <p:cNvSpPr/>
+          <p:nvPr/>
+        </p:nvSpPr>
+        <p:spPr>
+          <a:xfrm>
+            <a:off x="1234440" y="4599432"/>
+            <a:ext cx="1828800" cy="292608"/>
+          </a:xfrm>
+          <a:prstGeom prst="rect">
+            <a:avLst/>
+          </a:prstGeom>
+          <a:noFill/>
+          <a:ln/>
+        </p:spPr>
+        <p:txBody>
+          <a:bodyPr wrap="square" rtlCol="0" anchor="ctr"/>
+          <a:lstStyle/>
+          <a:p>
+            <a:pPr marL="0" indent="0">
+              <a:buNone/>
+            </a:pPr>
+            <a:r>
+              <a:rPr lang="en-US" sz="1200" b="1" kern="0" spc="100" dirty="0">
+                <a:solidFill>
+                  <a:srgbClr val="D99A5B"/>
+                </a:solidFill>
+                <a:latin typeface="Calibri" pitchFamily="34" charset="0"/>
+                <a:ea typeface="Calibri" pitchFamily="34" charset="-122"/>
+                <a:cs typeface="Calibri" pitchFamily="34" charset="-120"/>
+              </a:rPr>
+              <a:t>破除迷思</a:t>
+            </a:r>
+            <a:endParaRPr lang="en-US" sz="1200" dirty="0"/>
+          </a:p>
+        </p:txBody>
+      </p:sp>
+      <p:sp>
+        <p:nvSpPr>
+          <p:cNvPr id="9" name="Text 7"/>
+          <p:cNvSpPr/>
+          <p:nvPr/>
+        </p:nvSpPr>
+        <p:spPr>
+          <a:xfrm>
+            <a:off x="1234440" y="4864608"/>
+            <a:ext cx="9509760" cy="457200"/>
+          </a:xfrm>
+          <a:prstGeom prst="rect">
+            <a:avLst/>
+          </a:prstGeom>
+          <a:noFill/>
+          <a:ln/>
+        </p:spPr>
+        <p:txBody>
+          <a:bodyPr wrap="square" rtlCol="0" anchor="ctr"/>
+          <a:lstStyle/>
+          <a:p>
+            <a:pPr marL="0" indent="0">
+              <a:buNone/>
+            </a:pPr>
+            <a:r>
+              <a:rPr lang="en-US" sz="1600" i="1" strike="sngStrike" dirty="0">
+                <a:solidFill>
+                  <a:srgbClr val="C9A99A"/>
+                </a:solidFill>
+                <a:latin typeface="Calibri" pitchFamily="34" charset="0"/>
+                <a:ea typeface="Calibri" pitchFamily="34" charset="-122"/>
+                <a:cs typeface="Calibri" pitchFamily="34" charset="-120"/>
+              </a:rPr>
+              <a:t>「設了亞音＝私人頻道，別人聽不到」</a:t>
+            </a:r>
+            <a:r>
+              <a:rPr lang="en-US" sz="1600" dirty="0">
+                <a:solidFill>
+                  <a:srgbClr val="8C7A6E"/>
+                </a:solidFill>
+                <a:latin typeface="Calibri" pitchFamily="34" charset="0"/>
+                <a:ea typeface="Calibri" pitchFamily="34" charset="-122"/>
+                <a:cs typeface="Calibri" pitchFamily="34" charset="-120"/>
+              </a:rPr>
+              <a:t>　→　</a:t>
+            </a:r>
+            <a:r>
+              <a:rPr lang="en-US" sz="1700" b="1" dirty="0">
+                <a:solidFill>
+                  <a:srgbClr val="FBF7F2"/>
+                </a:solidFill>
+                <a:latin typeface="Cambria" pitchFamily="34" charset="0"/>
+                <a:ea typeface="Cambria" pitchFamily="34" charset="-122"/>
+                <a:cs typeface="Cambria" pitchFamily="34" charset="-120"/>
+              </a:rPr>
+              <a:t>它一點都不加密，只關你自己的喇叭</a:t>
+            </a:r>
+            <a:endParaRPr lang="en-US" sz="1600" dirty="0"/>
           </a:p>
         </p:txBody>
       </p:sp>
@@ -22830,1470 +21850,6 @@
 
 <file path=ppt/slides/slide30.xml><?xml version="1.0" encoding="utf-8"?>
 <p:sld xmlns:a="http://schemas.openxmlformats.org/drawingml/2006/main" xmlns:r="http://schemas.openxmlformats.org/officeDocument/2006/relationships" xmlns:p="http://schemas.openxmlformats.org/presentationml/2006/main">
-  <p:cSld name="Slide 29">
-    <p:bg>
-      <p:bgPr>
-        <a:solidFill>
-          <a:srgbClr val="FBF7F2"/>
-        </a:solidFill>
-        <a:effectLst/>
-      </p:bgPr>
-    </p:bg>
-    <p:spTree>
-      <p:nvGrpSpPr>
-        <p:cNvPr id="1" name=""/>
-        <p:cNvGrpSpPr/>
-        <p:nvPr/>
-      </p:nvGrpSpPr>
-      <p:grpSpPr>
-        <a:xfrm>
-          <a:off x="0" y="0"/>
-          <a:ext cx="0" cy="0"/>
-          <a:chOff x="0" y="0"/>
-          <a:chExt cx="0" cy="0"/>
-        </a:xfrm>
-      </p:grpSpPr>
-      <p:sp>
-        <p:nvSpPr>
-          <p:cNvPr id="2" name="Text 0"/>
-          <p:cNvSpPr/>
-          <p:nvPr/>
-        </p:nvSpPr>
-        <p:spPr>
-          <a:xfrm>
-            <a:off x="640080" y="384048"/>
-            <a:ext cx="10058400" cy="365760"/>
-          </a:xfrm>
-          <a:prstGeom prst="rect">
-            <a:avLst/>
-          </a:prstGeom>
-          <a:noFill/>
-          <a:ln/>
-        </p:spPr>
-        <p:txBody>
-          <a:bodyPr wrap="square" rtlCol="0" anchor="ctr"/>
-          <a:lstStyle/>
-          <a:p>
-            <a:pPr marL="0" indent="0">
-              <a:buNone/>
-            </a:pPr>
-            <a:r>
-              <a:rPr lang="en-US" sz="1400" b="1" kern="0" spc="200" dirty="0">
-                <a:solidFill>
-                  <a:srgbClr val="A44E36"/>
-                </a:solidFill>
-                <a:latin typeface="Calibri" pitchFamily="34" charset="0"/>
-                <a:ea typeface="Calibri" pitchFamily="34" charset="-122"/>
-                <a:cs typeface="Calibri" pitchFamily="34" charset="-120"/>
-              </a:rPr>
-              <a:t>動動腦 · 綜合設計</a:t>
-            </a:r>
-            <a:endParaRPr lang="en-US" sz="1400" dirty="0"/>
-          </a:p>
-        </p:txBody>
-      </p:sp>
-      <p:sp>
-        <p:nvSpPr>
-          <p:cNvPr id="3" name="Text 1"/>
-          <p:cNvSpPr/>
-          <p:nvPr/>
-        </p:nvSpPr>
-        <p:spPr>
-          <a:xfrm>
-            <a:off x="603504" y="713232"/>
-            <a:ext cx="10972800" cy="777240"/>
-          </a:xfrm>
-          <a:prstGeom prst="rect">
-            <a:avLst/>
-          </a:prstGeom>
-          <a:noFill/>
-          <a:ln/>
-        </p:spPr>
-        <p:txBody>
-          <a:bodyPr wrap="square" rtlCol="0" anchor="ctr"/>
-          <a:lstStyle/>
-          <a:p>
-            <a:pPr marL="0" indent="0">
-              <a:buNone/>
-            </a:pPr>
-            <a:r>
-              <a:rPr lang="en-US" sz="3200" b="1" dirty="0">
-                <a:solidFill>
-                  <a:srgbClr val="3A2E28"/>
-                </a:solidFill>
-                <a:latin typeface="Cambria" pitchFamily="34" charset="0"/>
-                <a:ea typeface="Cambria" pitchFamily="34" charset="-122"/>
-                <a:cs typeface="Cambria" pitchFamily="34" charset="-120"/>
-              </a:rPr>
-              <a:t>換你設計：架一座 2m 中繼台</a:t>
-            </a:r>
-            <a:endParaRPr lang="en-US" sz="3200" dirty="0"/>
-          </a:p>
-        </p:txBody>
-      </p:sp>
-      <p:sp>
-        <p:nvSpPr>
-          <p:cNvPr id="4" name="Shape 2"/>
-          <p:cNvSpPr/>
-          <p:nvPr/>
-        </p:nvSpPr>
-        <p:spPr>
-          <a:xfrm>
-            <a:off x="640080" y="1463040"/>
-            <a:ext cx="10972800" cy="841248"/>
-          </a:xfrm>
-          <a:prstGeom prst="roundRect">
-            <a:avLst>
-              <a:gd name="adj" fmla="val 13043"/>
-            </a:avLst>
-          </a:prstGeom>
-          <a:solidFill>
-            <a:srgbClr val="43312A"/>
-          </a:solidFill>
-          <a:ln/>
-          <a:effectLst>
-            <a:outerShdw blurRad="114300" dist="50800" dir="5400000" algn="bl" rotWithShape="0">
-              <a:srgbClr val="6B4A3A">
-                <a:alpha val="28000"/>
-              </a:srgbClr>
-            </a:outerShdw>
-          </a:effectLst>
-        </p:spPr>
-      </p:sp>
-      <p:sp>
-        <p:nvSpPr>
-          <p:cNvPr id="5" name="Text 3"/>
-          <p:cNvSpPr/>
-          <p:nvPr/>
-        </p:nvSpPr>
-        <p:spPr>
-          <a:xfrm>
-            <a:off x="914400" y="1463040"/>
-            <a:ext cx="10424160" cy="841248"/>
-          </a:xfrm>
-          <a:prstGeom prst="rect">
-            <a:avLst/>
-          </a:prstGeom>
-          <a:noFill/>
-          <a:ln/>
-        </p:spPr>
-        <p:txBody>
-          <a:bodyPr wrap="square" rtlCol="0" anchor="ctr"/>
-          <a:lstStyle/>
-          <a:p>
-            <a:pPr marL="0" indent="0">
-              <a:buNone/>
-            </a:pPr>
-            <a:r>
-              <a:rPr lang="en-US" sz="1500" b="1" dirty="0">
-                <a:solidFill>
-                  <a:srgbClr val="D99A5B"/>
-                </a:solidFill>
-                <a:latin typeface="Cambria" pitchFamily="34" charset="0"/>
-                <a:ea typeface="Cambria" pitchFamily="34" charset="-122"/>
-                <a:cs typeface="Cambria" pitchFamily="34" charset="-120"/>
-              </a:rPr>
-              <a:t>情境　</a:t>
-            </a:r>
-            <a:r>
-              <a:rPr lang="en-US" sz="1400" dirty="0">
-                <a:solidFill>
-                  <a:srgbClr val="FBF7F2"/>
-                </a:solidFill>
-                <a:latin typeface="Calibri" pitchFamily="34" charset="0"/>
-                <a:ea typeface="Calibri" pitchFamily="34" charset="-122"/>
-                <a:cs typeface="Calibri" pitchFamily="34" charset="-120"/>
-              </a:rPr>
-              <a:t>你要在你們的區域架一座 2m 中繼台（同時收、同時發）。用學過的概念決定它的參數——每一項都要說得出「為什麼」。</a:t>
-            </a:r>
-            <a:endParaRPr lang="en-US" sz="1500" dirty="0"/>
-          </a:p>
-        </p:txBody>
-      </p:sp>
-      <p:sp>
-        <p:nvSpPr>
-          <p:cNvPr id="6" name="Shape 4"/>
-          <p:cNvSpPr/>
-          <p:nvPr/>
-        </p:nvSpPr>
-        <p:spPr>
-          <a:xfrm>
-            <a:off x="640080" y="2487168"/>
-            <a:ext cx="5486400" cy="1481328"/>
-          </a:xfrm>
-          <a:prstGeom prst="roundRect">
-            <a:avLst>
-              <a:gd name="adj" fmla="val 7407"/>
-            </a:avLst>
-          </a:prstGeom>
-          <a:solidFill>
-            <a:srgbClr val="FFFFFF"/>
-          </a:solidFill>
-          <a:ln/>
-          <a:effectLst>
-            <a:outerShdw blurRad="114300" dist="50800" dir="5400000" algn="bl" rotWithShape="0">
-              <a:srgbClr val="6B4A3A">
-                <a:alpha val="28000"/>
-              </a:srgbClr>
-            </a:outerShdw>
-          </a:effectLst>
-        </p:spPr>
-      </p:sp>
-      <p:sp>
-        <p:nvSpPr>
-          <p:cNvPr id="7" name="Shape 5"/>
-          <p:cNvSpPr/>
-          <p:nvPr/>
-        </p:nvSpPr>
-        <p:spPr>
-          <a:xfrm>
-            <a:off x="877824" y="2743200"/>
-            <a:ext cx="548640" cy="548640"/>
-          </a:xfrm>
-          <a:prstGeom prst="ellipse">
-            <a:avLst/>
-          </a:prstGeom>
-          <a:solidFill>
-            <a:srgbClr val="C0674A"/>
-          </a:solidFill>
-          <a:ln/>
-        </p:spPr>
-      </p:sp>
-      <p:sp>
-        <p:nvSpPr>
-          <p:cNvPr id="8" name="Text 6"/>
-          <p:cNvSpPr/>
-          <p:nvPr/>
-        </p:nvSpPr>
-        <p:spPr>
-          <a:xfrm>
-            <a:off x="877824" y="2743200"/>
-            <a:ext cx="548640" cy="548640"/>
-          </a:xfrm>
-          <a:prstGeom prst="rect">
-            <a:avLst/>
-          </a:prstGeom>
-          <a:noFill/>
-          <a:ln/>
-        </p:spPr>
-        <p:txBody>
-          <a:bodyPr wrap="square" rtlCol="0" anchor="ctr"/>
-          <a:lstStyle/>
-          <a:p>
-            <a:pPr marL="0" indent="0" algn="ctr">
-              <a:buNone/>
-            </a:pPr>
-            <a:r>
-              <a:rPr lang="en-US" sz="2000" b="1" dirty="0">
-                <a:solidFill>
-                  <a:srgbClr val="FFFFFF"/>
-                </a:solidFill>
-                <a:latin typeface="Cambria" pitchFamily="34" charset="0"/>
-                <a:ea typeface="Cambria" pitchFamily="34" charset="-122"/>
-                <a:cs typeface="Cambria" pitchFamily="34" charset="-120"/>
-              </a:rPr>
-              <a:t>1</a:t>
-            </a:r>
-            <a:endParaRPr lang="en-US" sz="2000" dirty="0"/>
-          </a:p>
-        </p:txBody>
-      </p:sp>
-      <p:sp>
-        <p:nvSpPr>
-          <p:cNvPr id="9" name="Text 7"/>
-          <p:cNvSpPr/>
-          <p:nvPr/>
-        </p:nvSpPr>
-        <p:spPr>
-          <a:xfrm>
-            <a:off x="1600200" y="2651760"/>
-            <a:ext cx="4389120" cy="365760"/>
-          </a:xfrm>
-          <a:prstGeom prst="rect">
-            <a:avLst/>
-          </a:prstGeom>
-          <a:noFill/>
-          <a:ln/>
-        </p:spPr>
-        <p:txBody>
-          <a:bodyPr wrap="square" rtlCol="0" anchor="ctr"/>
-          <a:lstStyle/>
-          <a:p>
-            <a:pPr marL="0" indent="0">
-              <a:buNone/>
-            </a:pPr>
-            <a:r>
-              <a:rPr lang="en-US" sz="1550" b="1" dirty="0">
-                <a:solidFill>
-                  <a:srgbClr val="3A2E28"/>
-                </a:solidFill>
-                <a:latin typeface="Cambria" pitchFamily="34" charset="0"/>
-                <a:ea typeface="Cambria" pitchFamily="34" charset="-122"/>
-                <a:cs typeface="Cambria" pitchFamily="34" charset="-120"/>
-              </a:rPr>
-              <a:t>輸入 / 輸出頻率與位移</a:t>
-            </a:r>
-            <a:endParaRPr lang="en-US" sz="1550" dirty="0"/>
-          </a:p>
-        </p:txBody>
-      </p:sp>
-      <p:sp>
-        <p:nvSpPr>
-          <p:cNvPr id="10" name="Text 8"/>
-          <p:cNvSpPr/>
-          <p:nvPr/>
-        </p:nvSpPr>
-        <p:spPr>
-          <a:xfrm>
-            <a:off x="1600200" y="3035808"/>
-            <a:ext cx="4389120" cy="310896"/>
-          </a:xfrm>
-          <a:prstGeom prst="rect">
-            <a:avLst/>
-          </a:prstGeom>
-          <a:noFill/>
-          <a:ln/>
-        </p:spPr>
-        <p:txBody>
-          <a:bodyPr wrap="square" rtlCol="0" anchor="ctr"/>
-          <a:lstStyle/>
-          <a:p>
-            <a:pPr marL="0" indent="0">
-              <a:buNone/>
-            </a:pPr>
-            <a:r>
-              <a:rPr lang="en-US" sz="1250" b="1" dirty="0">
-                <a:solidFill>
-                  <a:srgbClr val="C0674A"/>
-                </a:solidFill>
-                <a:latin typeface="Calibri" pitchFamily="34" charset="0"/>
-                <a:ea typeface="Calibri" pitchFamily="34" charset="-122"/>
-                <a:cs typeface="Calibri" pitchFamily="34" charset="-120"/>
-              </a:rPr>
-              <a:t>輸入輸出要差多遠？往上還是往下？</a:t>
-            </a:r>
-            <a:endParaRPr lang="en-US" sz="1250" dirty="0"/>
-          </a:p>
-        </p:txBody>
-      </p:sp>
-      <p:sp>
-        <p:nvSpPr>
-          <p:cNvPr id="11" name="Text 9"/>
-          <p:cNvSpPr/>
-          <p:nvPr/>
-        </p:nvSpPr>
-        <p:spPr>
-          <a:xfrm>
-            <a:off x="1600200" y="3364992"/>
-            <a:ext cx="4434840" cy="512064"/>
-          </a:xfrm>
-          <a:prstGeom prst="rect">
-            <a:avLst/>
-          </a:prstGeom>
-          <a:noFill/>
-          <a:ln/>
-        </p:spPr>
-        <p:txBody>
-          <a:bodyPr wrap="square" rtlCol="0" anchor="t"/>
-          <a:lstStyle/>
-          <a:p>
-            <a:pPr marL="0" indent="0">
-              <a:lnSpc>
-                <a:spcPct val="100000"/>
-              </a:lnSpc>
-              <a:buNone/>
-            </a:pPr>
-            <a:r>
-              <a:rPr lang="en-US" sz="1050" b="1" dirty="0">
-                <a:solidFill>
-                  <a:srgbClr val="8C7A6E"/>
-                </a:solidFill>
-                <a:latin typeface="Calibri" pitchFamily="34" charset="0"/>
-                <a:ea typeface="Calibri" pitchFamily="34" charset="-122"/>
-                <a:cs typeface="Calibri" pitchFamily="34" charset="-120"/>
-              </a:rPr>
-              <a:t>提示　</a:t>
-            </a:r>
-            <a:r>
-              <a:rPr lang="en-US" sz="1050" dirty="0">
-                <a:solidFill>
-                  <a:srgbClr val="8C7A6E"/>
-                </a:solidFill>
-                <a:latin typeface="Calibri" pitchFamily="34" charset="0"/>
-                <a:ea typeface="Calibri" pitchFamily="34" charset="-122"/>
-                <a:cs typeface="Calibri" pitchFamily="34" charset="-120"/>
-              </a:rPr>
-              <a:t>為什麼不能只差 12.5 kHz？（回想：保護頻帶＋它同時在收也在發）</a:t>
-            </a:r>
-            <a:endParaRPr lang="en-US" sz="1050" dirty="0"/>
-          </a:p>
-        </p:txBody>
-      </p:sp>
-      <p:sp>
-        <p:nvSpPr>
-          <p:cNvPr id="12" name="Shape 10"/>
-          <p:cNvSpPr/>
-          <p:nvPr/>
-        </p:nvSpPr>
-        <p:spPr>
-          <a:xfrm>
-            <a:off x="6263640" y="2487168"/>
-            <a:ext cx="5486400" cy="1481328"/>
-          </a:xfrm>
-          <a:prstGeom prst="roundRect">
-            <a:avLst>
-              <a:gd name="adj" fmla="val 7407"/>
-            </a:avLst>
-          </a:prstGeom>
-          <a:solidFill>
-            <a:srgbClr val="FFFFFF"/>
-          </a:solidFill>
-          <a:ln/>
-          <a:effectLst>
-            <a:outerShdw blurRad="114300" dist="50800" dir="5400000" algn="bl" rotWithShape="0">
-              <a:srgbClr val="6B4A3A">
-                <a:alpha val="28000"/>
-              </a:srgbClr>
-            </a:outerShdw>
-          </a:effectLst>
-        </p:spPr>
-      </p:sp>
-      <p:sp>
-        <p:nvSpPr>
-          <p:cNvPr id="13" name="Shape 11"/>
-          <p:cNvSpPr/>
-          <p:nvPr/>
-        </p:nvSpPr>
-        <p:spPr>
-          <a:xfrm>
-            <a:off x="6501384" y="2743200"/>
-            <a:ext cx="548640" cy="548640"/>
-          </a:xfrm>
-          <a:prstGeom prst="ellipse">
-            <a:avLst/>
-          </a:prstGeom>
-          <a:solidFill>
-            <a:srgbClr val="D99A5B"/>
-          </a:solidFill>
-          <a:ln/>
-        </p:spPr>
-      </p:sp>
-      <p:sp>
-        <p:nvSpPr>
-          <p:cNvPr id="14" name="Text 12"/>
-          <p:cNvSpPr/>
-          <p:nvPr/>
-        </p:nvSpPr>
-        <p:spPr>
-          <a:xfrm>
-            <a:off x="6501384" y="2743200"/>
-            <a:ext cx="548640" cy="548640"/>
-          </a:xfrm>
-          <a:prstGeom prst="rect">
-            <a:avLst/>
-          </a:prstGeom>
-          <a:noFill/>
-          <a:ln/>
-        </p:spPr>
-        <p:txBody>
-          <a:bodyPr wrap="square" rtlCol="0" anchor="ctr"/>
-          <a:lstStyle/>
-          <a:p>
-            <a:pPr marL="0" indent="0" algn="ctr">
-              <a:buNone/>
-            </a:pPr>
-            <a:r>
-              <a:rPr lang="en-US" sz="2000" b="1" dirty="0">
-                <a:solidFill>
-                  <a:srgbClr val="FFFFFF"/>
-                </a:solidFill>
-                <a:latin typeface="Cambria" pitchFamily="34" charset="0"/>
-                <a:ea typeface="Cambria" pitchFamily="34" charset="-122"/>
-                <a:cs typeface="Cambria" pitchFamily="34" charset="-120"/>
-              </a:rPr>
-              <a:t>2</a:t>
-            </a:r>
-            <a:endParaRPr lang="en-US" sz="2000" dirty="0"/>
-          </a:p>
-        </p:txBody>
-      </p:sp>
-      <p:sp>
-        <p:nvSpPr>
-          <p:cNvPr id="15" name="Text 13"/>
-          <p:cNvSpPr/>
-          <p:nvPr/>
-        </p:nvSpPr>
-        <p:spPr>
-          <a:xfrm>
-            <a:off x="7223760" y="2651760"/>
-            <a:ext cx="4389120" cy="365760"/>
-          </a:xfrm>
-          <a:prstGeom prst="rect">
-            <a:avLst/>
-          </a:prstGeom>
-          <a:noFill/>
-          <a:ln/>
-        </p:spPr>
-        <p:txBody>
-          <a:bodyPr wrap="square" rtlCol="0" anchor="ctr"/>
-          <a:lstStyle/>
-          <a:p>
-            <a:pPr marL="0" indent="0">
-              <a:buNone/>
-            </a:pPr>
-            <a:r>
-              <a:rPr lang="en-US" sz="1550" b="1" dirty="0">
-                <a:solidFill>
-                  <a:srgbClr val="3A2E28"/>
-                </a:solidFill>
-                <a:latin typeface="Cambria" pitchFamily="34" charset="0"/>
-                <a:ea typeface="Cambria" pitchFamily="34" charset="-122"/>
-                <a:cs typeface="Cambria" pitchFamily="34" charset="-120"/>
-              </a:rPr>
-              <a:t>亞音（存取）</a:t>
-            </a:r>
-            <a:endParaRPr lang="en-US" sz="1550" dirty="0"/>
-          </a:p>
-        </p:txBody>
-      </p:sp>
-      <p:sp>
-        <p:nvSpPr>
-          <p:cNvPr id="16" name="Text 14"/>
-          <p:cNvSpPr/>
-          <p:nvPr/>
-        </p:nvSpPr>
-        <p:spPr>
-          <a:xfrm>
-            <a:off x="7223760" y="3035808"/>
-            <a:ext cx="4389120" cy="310896"/>
-          </a:xfrm>
-          <a:prstGeom prst="rect">
-            <a:avLst/>
-          </a:prstGeom>
-          <a:noFill/>
-          <a:ln/>
-        </p:spPr>
-        <p:txBody>
-          <a:bodyPr wrap="square" rtlCol="0" anchor="ctr"/>
-          <a:lstStyle/>
-          <a:p>
-            <a:pPr marL="0" indent="0">
-              <a:buNone/>
-            </a:pPr>
-            <a:r>
-              <a:rPr lang="en-US" sz="1250" b="1" dirty="0">
-                <a:solidFill>
-                  <a:srgbClr val="A44E36"/>
-                </a:solidFill>
-                <a:latin typeface="Calibri" pitchFamily="34" charset="0"/>
-                <a:ea typeface="Calibri" pitchFamily="34" charset="-122"/>
-                <a:cs typeface="Calibri" pitchFamily="34" charset="-120"/>
-              </a:rPr>
-              <a:t>中繼台要不要要求開台亞音？</a:t>
-            </a:r>
-            <a:endParaRPr lang="en-US" sz="1250" dirty="0"/>
-          </a:p>
-        </p:txBody>
-      </p:sp>
-      <p:sp>
-        <p:nvSpPr>
-          <p:cNvPr id="17" name="Text 15"/>
-          <p:cNvSpPr/>
-          <p:nvPr/>
-        </p:nvSpPr>
-        <p:spPr>
-          <a:xfrm>
-            <a:off x="7223760" y="3364992"/>
-            <a:ext cx="4434840" cy="512064"/>
-          </a:xfrm>
-          <a:prstGeom prst="rect">
-            <a:avLst/>
-          </a:prstGeom>
-          <a:noFill/>
-          <a:ln/>
-        </p:spPr>
-        <p:txBody>
-          <a:bodyPr wrap="square" rtlCol="0" anchor="t"/>
-          <a:lstStyle/>
-          <a:p>
-            <a:pPr marL="0" indent="0">
-              <a:lnSpc>
-                <a:spcPct val="100000"/>
-              </a:lnSpc>
-              <a:buNone/>
-            </a:pPr>
-            <a:r>
-              <a:rPr lang="en-US" sz="1050" b="1" dirty="0">
-                <a:solidFill>
-                  <a:srgbClr val="8C7A6E"/>
-                </a:solidFill>
-                <a:latin typeface="Calibri" pitchFamily="34" charset="0"/>
-                <a:ea typeface="Calibri" pitchFamily="34" charset="-122"/>
-                <a:cs typeface="Calibri" pitchFamily="34" charset="-120"/>
-              </a:rPr>
-              <a:t>提示　</a:t>
-            </a:r>
-            <a:r>
-              <a:rPr lang="en-US" sz="1050" dirty="0">
-                <a:solidFill>
-                  <a:srgbClr val="8C7A6E"/>
-                </a:solidFill>
-                <a:latin typeface="Calibri" pitchFamily="34" charset="0"/>
-                <a:ea typeface="Calibri" pitchFamily="34" charset="-122"/>
-                <a:cs typeface="Calibri" pitchFamily="34" charset="-120"/>
-              </a:rPr>
-              <a:t>設它是為了擋住雜訊誤觸——但它不加密，話還是明語（S6）</a:t>
-            </a:r>
-            <a:endParaRPr lang="en-US" sz="1050" dirty="0"/>
-          </a:p>
-        </p:txBody>
-      </p:sp>
-      <p:sp>
-        <p:nvSpPr>
-          <p:cNvPr id="18" name="Shape 16"/>
-          <p:cNvSpPr/>
-          <p:nvPr/>
-        </p:nvSpPr>
-        <p:spPr>
-          <a:xfrm>
-            <a:off x="640080" y="4114800"/>
-            <a:ext cx="5486400" cy="1481328"/>
-          </a:xfrm>
-          <a:prstGeom prst="roundRect">
-            <a:avLst>
-              <a:gd name="adj" fmla="val 7407"/>
-            </a:avLst>
-          </a:prstGeom>
-          <a:solidFill>
-            <a:srgbClr val="FFFFFF"/>
-          </a:solidFill>
-          <a:ln/>
-          <a:effectLst>
-            <a:outerShdw blurRad="114300" dist="50800" dir="5400000" algn="bl" rotWithShape="0">
-              <a:srgbClr val="6B4A3A">
-                <a:alpha val="28000"/>
-              </a:srgbClr>
-            </a:outerShdw>
-          </a:effectLst>
-        </p:spPr>
-      </p:sp>
-      <p:sp>
-        <p:nvSpPr>
-          <p:cNvPr id="19" name="Shape 17"/>
-          <p:cNvSpPr/>
-          <p:nvPr/>
-        </p:nvSpPr>
-        <p:spPr>
-          <a:xfrm>
-            <a:off x="877824" y="4370832"/>
-            <a:ext cx="548640" cy="548640"/>
-          </a:xfrm>
-          <a:prstGeom prst="ellipse">
-            <a:avLst/>
-          </a:prstGeom>
-          <a:solidFill>
-            <a:srgbClr val="8AA08C"/>
-          </a:solidFill>
-          <a:ln/>
-        </p:spPr>
-      </p:sp>
-      <p:sp>
-        <p:nvSpPr>
-          <p:cNvPr id="20" name="Text 18"/>
-          <p:cNvSpPr/>
-          <p:nvPr/>
-        </p:nvSpPr>
-        <p:spPr>
-          <a:xfrm>
-            <a:off x="877824" y="4370832"/>
-            <a:ext cx="548640" cy="548640"/>
-          </a:xfrm>
-          <a:prstGeom prst="rect">
-            <a:avLst/>
-          </a:prstGeom>
-          <a:noFill/>
-          <a:ln/>
-        </p:spPr>
-        <p:txBody>
-          <a:bodyPr wrap="square" rtlCol="0" anchor="ctr"/>
-          <a:lstStyle/>
-          <a:p>
-            <a:pPr marL="0" indent="0" algn="ctr">
-              <a:buNone/>
-            </a:pPr>
-            <a:r>
-              <a:rPr lang="en-US" sz="2000" b="1" dirty="0">
-                <a:solidFill>
-                  <a:srgbClr val="FFFFFF"/>
-                </a:solidFill>
-                <a:latin typeface="Cambria" pitchFamily="34" charset="0"/>
-                <a:ea typeface="Cambria" pitchFamily="34" charset="-122"/>
-                <a:cs typeface="Cambria" pitchFamily="34" charset="-120"/>
-              </a:rPr>
-              <a:t>3</a:t>
-            </a:r>
-            <a:endParaRPr lang="en-US" sz="2000" dirty="0"/>
-          </a:p>
-        </p:txBody>
-      </p:sp>
-      <p:sp>
-        <p:nvSpPr>
-          <p:cNvPr id="21" name="Text 19"/>
-          <p:cNvSpPr/>
-          <p:nvPr/>
-        </p:nvSpPr>
-        <p:spPr>
-          <a:xfrm>
-            <a:off x="1600200" y="4279392"/>
-            <a:ext cx="4389120" cy="365760"/>
-          </a:xfrm>
-          <a:prstGeom prst="rect">
-            <a:avLst/>
-          </a:prstGeom>
-          <a:noFill/>
-          <a:ln/>
-        </p:spPr>
-        <p:txBody>
-          <a:bodyPr wrap="square" rtlCol="0" anchor="ctr"/>
-          <a:lstStyle/>
-          <a:p>
-            <a:pPr marL="0" indent="0">
-              <a:buNone/>
-            </a:pPr>
-            <a:r>
-              <a:rPr lang="en-US" sz="1550" b="1" dirty="0">
-                <a:solidFill>
-                  <a:srgbClr val="3A2E28"/>
-                </a:solidFill>
-                <a:latin typeface="Cambria" pitchFamily="34" charset="0"/>
-                <a:ea typeface="Cambria" pitchFamily="34" charset="-122"/>
-                <a:cs typeface="Cambria" pitchFamily="34" charset="-120"/>
-              </a:rPr>
-              <a:t>功率與架設位置</a:t>
-            </a:r>
-            <a:endParaRPr lang="en-US" sz="1550" dirty="0"/>
-          </a:p>
-        </p:txBody>
-      </p:sp>
-      <p:sp>
-        <p:nvSpPr>
-          <p:cNvPr id="22" name="Text 20"/>
-          <p:cNvSpPr/>
-          <p:nvPr/>
-        </p:nvSpPr>
-        <p:spPr>
-          <a:xfrm>
-            <a:off x="1600200" y="4663440"/>
-            <a:ext cx="4389120" cy="310896"/>
-          </a:xfrm>
-          <a:prstGeom prst="rect">
-            <a:avLst/>
-          </a:prstGeom>
-          <a:noFill/>
-          <a:ln/>
-        </p:spPr>
-        <p:txBody>
-          <a:bodyPr wrap="square" rtlCol="0" anchor="ctr"/>
-          <a:lstStyle/>
-          <a:p>
-            <a:pPr marL="0" indent="0">
-              <a:buNone/>
-            </a:pPr>
-            <a:r>
-              <a:rPr lang="en-US" sz="1250" b="1" dirty="0">
-                <a:solidFill>
-                  <a:srgbClr val="8AA08C"/>
-                </a:solidFill>
-                <a:latin typeface="Calibri" pitchFamily="34" charset="0"/>
-                <a:ea typeface="Calibri" pitchFamily="34" charset="-122"/>
-                <a:cs typeface="Calibri" pitchFamily="34" charset="-120"/>
-              </a:rPr>
-              <a:t>多大功率？架多高？</a:t>
-            </a:r>
-            <a:endParaRPr lang="en-US" sz="1250" dirty="0"/>
-          </a:p>
-        </p:txBody>
-      </p:sp>
-      <p:sp>
-        <p:nvSpPr>
-          <p:cNvPr id="23" name="Text 21"/>
-          <p:cNvSpPr/>
-          <p:nvPr/>
-        </p:nvSpPr>
-        <p:spPr>
-          <a:xfrm>
-            <a:off x="1600200" y="4992624"/>
-            <a:ext cx="4434840" cy="512064"/>
-          </a:xfrm>
-          <a:prstGeom prst="rect">
-            <a:avLst/>
-          </a:prstGeom>
-          <a:noFill/>
-          <a:ln/>
-        </p:spPr>
-        <p:txBody>
-          <a:bodyPr wrap="square" rtlCol="0" anchor="t"/>
-          <a:lstStyle/>
-          <a:p>
-            <a:pPr marL="0" indent="0">
-              <a:lnSpc>
-                <a:spcPct val="100000"/>
-              </a:lnSpc>
-              <a:buNone/>
-            </a:pPr>
-            <a:r>
-              <a:rPr lang="en-US" sz="1050" b="1" dirty="0">
-                <a:solidFill>
-                  <a:srgbClr val="8C7A6E"/>
-                </a:solidFill>
-                <a:latin typeface="Calibri" pitchFamily="34" charset="0"/>
-                <a:ea typeface="Calibri" pitchFamily="34" charset="-122"/>
-                <a:cs typeface="Calibri" pitchFamily="34" charset="-120"/>
-              </a:rPr>
-              <a:t>提示　</a:t>
-            </a:r>
-            <a:r>
-              <a:rPr lang="en-US" sz="1050" dirty="0">
-                <a:solidFill>
-                  <a:srgbClr val="8C7A6E"/>
-                </a:solidFill>
-                <a:latin typeface="Calibri" pitchFamily="34" charset="0"/>
-                <a:ea typeface="Calibri" pitchFamily="34" charset="-122"/>
-                <a:cs typeface="Calibri" pitchFamily="34" charset="-120"/>
-              </a:rPr>
-              <a:t>中繼台要覆蓋廣所以架高、功率大；但也把干擾半徑放大（S3）</a:t>
-            </a:r>
-            <a:endParaRPr lang="en-US" sz="1050" dirty="0"/>
-          </a:p>
-        </p:txBody>
-      </p:sp>
-      <p:sp>
-        <p:nvSpPr>
-          <p:cNvPr id="24" name="Shape 22"/>
-          <p:cNvSpPr/>
-          <p:nvPr/>
-        </p:nvSpPr>
-        <p:spPr>
-          <a:xfrm>
-            <a:off x="6263640" y="4114800"/>
-            <a:ext cx="5486400" cy="1481328"/>
-          </a:xfrm>
-          <a:prstGeom prst="roundRect">
-            <a:avLst>
-              <a:gd name="adj" fmla="val 7407"/>
-            </a:avLst>
-          </a:prstGeom>
-          <a:solidFill>
-            <a:srgbClr val="FFFFFF"/>
-          </a:solidFill>
-          <a:ln/>
-          <a:effectLst>
-            <a:outerShdw blurRad="114300" dist="50800" dir="5400000" algn="bl" rotWithShape="0">
-              <a:srgbClr val="6B4A3A">
-                <a:alpha val="28000"/>
-              </a:srgbClr>
-            </a:outerShdw>
-          </a:effectLst>
-        </p:spPr>
-      </p:sp>
-      <p:sp>
-        <p:nvSpPr>
-          <p:cNvPr id="25" name="Shape 23"/>
-          <p:cNvSpPr/>
-          <p:nvPr/>
-        </p:nvSpPr>
-        <p:spPr>
-          <a:xfrm>
-            <a:off x="6501384" y="4370832"/>
-            <a:ext cx="548640" cy="548640"/>
-          </a:xfrm>
-          <a:prstGeom prst="ellipse">
-            <a:avLst/>
-          </a:prstGeom>
-          <a:solidFill>
-            <a:srgbClr val="A44E36"/>
-          </a:solidFill>
-          <a:ln/>
-        </p:spPr>
-      </p:sp>
-      <p:sp>
-        <p:nvSpPr>
-          <p:cNvPr id="26" name="Text 24"/>
-          <p:cNvSpPr/>
-          <p:nvPr/>
-        </p:nvSpPr>
-        <p:spPr>
-          <a:xfrm>
-            <a:off x="6501384" y="4370832"/>
-            <a:ext cx="548640" cy="548640"/>
-          </a:xfrm>
-          <a:prstGeom prst="rect">
-            <a:avLst/>
-          </a:prstGeom>
-          <a:noFill/>
-          <a:ln/>
-        </p:spPr>
-        <p:txBody>
-          <a:bodyPr wrap="square" rtlCol="0" anchor="ctr"/>
-          <a:lstStyle/>
-          <a:p>
-            <a:pPr marL="0" indent="0" algn="ctr">
-              <a:buNone/>
-            </a:pPr>
-            <a:r>
-              <a:rPr lang="en-US" sz="2000" b="1" dirty="0">
-                <a:solidFill>
-                  <a:srgbClr val="FFFFFF"/>
-                </a:solidFill>
-                <a:latin typeface="Cambria" pitchFamily="34" charset="0"/>
-                <a:ea typeface="Cambria" pitchFamily="34" charset="-122"/>
-                <a:cs typeface="Cambria" pitchFamily="34" charset="-120"/>
-              </a:rPr>
-              <a:t>4</a:t>
-            </a:r>
-            <a:endParaRPr lang="en-US" sz="2000" dirty="0"/>
-          </a:p>
-        </p:txBody>
-      </p:sp>
-      <p:sp>
-        <p:nvSpPr>
-          <p:cNvPr id="27" name="Text 25"/>
-          <p:cNvSpPr/>
-          <p:nvPr/>
-        </p:nvSpPr>
-        <p:spPr>
-          <a:xfrm>
-            <a:off x="7223760" y="4279392"/>
-            <a:ext cx="4389120" cy="365760"/>
-          </a:xfrm>
-          <a:prstGeom prst="rect">
-            <a:avLst/>
-          </a:prstGeom>
-          <a:noFill/>
-          <a:ln/>
-        </p:spPr>
-        <p:txBody>
-          <a:bodyPr wrap="square" rtlCol="0" anchor="ctr"/>
-          <a:lstStyle/>
-          <a:p>
-            <a:pPr marL="0" indent="0">
-              <a:buNone/>
-            </a:pPr>
-            <a:r>
-              <a:rPr lang="en-US" sz="1550" b="1" dirty="0">
-                <a:solidFill>
-                  <a:srgbClr val="3A2E28"/>
-                </a:solidFill>
-                <a:latin typeface="Cambria" pitchFamily="34" charset="0"/>
-                <a:ea typeface="Cambria" pitchFamily="34" charset="-122"/>
-                <a:cs typeface="Cambria" pitchFamily="34" charset="-120"/>
-              </a:rPr>
-              <a:t>和鄰台的協調</a:t>
-            </a:r>
-            <a:endParaRPr lang="en-US" sz="1550" dirty="0"/>
-          </a:p>
-        </p:txBody>
-      </p:sp>
-      <p:sp>
-        <p:nvSpPr>
-          <p:cNvPr id="28" name="Text 26"/>
-          <p:cNvSpPr/>
-          <p:nvPr/>
-        </p:nvSpPr>
-        <p:spPr>
-          <a:xfrm>
-            <a:off x="7223760" y="4663440"/>
-            <a:ext cx="4389120" cy="310896"/>
-          </a:xfrm>
-          <a:prstGeom prst="rect">
-            <a:avLst/>
-          </a:prstGeom>
-          <a:noFill/>
-          <a:ln/>
-        </p:spPr>
-        <p:txBody>
-          <a:bodyPr wrap="square" rtlCol="0" anchor="ctr"/>
-          <a:lstStyle/>
-          <a:p>
-            <a:pPr marL="0" indent="0">
-              <a:buNone/>
-            </a:pPr>
-            <a:r>
-              <a:rPr lang="en-US" sz="1250" b="1" dirty="0">
-                <a:solidFill>
-                  <a:srgbClr val="A44E36"/>
-                </a:solidFill>
-                <a:latin typeface="Calibri" pitchFamily="34" charset="0"/>
-                <a:ea typeface="Calibri" pitchFamily="34" charset="-122"/>
-                <a:cs typeface="Calibri" pitchFamily="34" charset="-120"/>
-              </a:rPr>
-              <a:t>會不會和附近的中繼台打架？</a:t>
-            </a:r>
-            <a:endParaRPr lang="en-US" sz="1250" dirty="0"/>
-          </a:p>
-        </p:txBody>
-      </p:sp>
-      <p:sp>
-        <p:nvSpPr>
-          <p:cNvPr id="29" name="Text 27"/>
-          <p:cNvSpPr/>
-          <p:nvPr/>
-        </p:nvSpPr>
-        <p:spPr>
-          <a:xfrm>
-            <a:off x="7223760" y="4992624"/>
-            <a:ext cx="4434840" cy="512064"/>
-          </a:xfrm>
-          <a:prstGeom prst="rect">
-            <a:avLst/>
-          </a:prstGeom>
-          <a:noFill/>
-          <a:ln/>
-        </p:spPr>
-        <p:txBody>
-          <a:bodyPr wrap="square" rtlCol="0" anchor="t"/>
-          <a:lstStyle/>
-          <a:p>
-            <a:pPr marL="0" indent="0">
-              <a:lnSpc>
-                <a:spcPct val="100000"/>
-              </a:lnSpc>
-              <a:buNone/>
-            </a:pPr>
-            <a:r>
-              <a:rPr lang="en-US" sz="1050" b="1" dirty="0">
-                <a:solidFill>
-                  <a:srgbClr val="8C7A6E"/>
-                </a:solidFill>
-                <a:latin typeface="Calibri" pitchFamily="34" charset="0"/>
-                <a:ea typeface="Calibri" pitchFamily="34" charset="-122"/>
-                <a:cs typeface="Calibri" pitchFamily="34" charset="-120"/>
-              </a:rPr>
-              <a:t>提示　</a:t>
-            </a:r>
-            <a:r>
-              <a:rPr lang="en-US" sz="1050" dirty="0">
-                <a:solidFill>
-                  <a:srgbClr val="8C7A6E"/>
-                </a:solidFill>
-                <a:latin typeface="Calibri" pitchFamily="34" charset="0"/>
-                <a:ea typeface="Calibri" pitchFamily="34" charset="-122"/>
-                <a:cs typeface="Calibri" pitchFamily="34" charset="-120"/>
-              </a:rPr>
-              <a:t>鄰台的輸入/輸出若太近，就是放大版的鄰頻重疊（S5）</a:t>
-            </a:r>
-            <a:endParaRPr lang="en-US" sz="1050" dirty="0"/>
-          </a:p>
-        </p:txBody>
-      </p:sp>
-      <p:sp>
-        <p:nvSpPr>
-          <p:cNvPr id="30" name="Shape 28"/>
-          <p:cNvSpPr/>
-          <p:nvPr/>
-        </p:nvSpPr>
-        <p:spPr>
-          <a:xfrm>
-            <a:off x="640080" y="5623560"/>
-            <a:ext cx="10927080" cy="731520"/>
-          </a:xfrm>
-          <a:prstGeom prst="roundRect">
-            <a:avLst>
-              <a:gd name="adj" fmla="val 15000"/>
-            </a:avLst>
-          </a:prstGeom>
-          <a:solidFill>
-            <a:srgbClr val="F3EADF"/>
-          </a:solidFill>
-          <a:ln/>
-          <a:effectLst>
-            <a:outerShdw blurRad="114300" dist="50800" dir="5400000" algn="bl" rotWithShape="0">
-              <a:srgbClr val="6B4A3A">
-                <a:alpha val="28000"/>
-              </a:srgbClr>
-            </a:outerShdw>
-          </a:effectLst>
-        </p:spPr>
-      </p:sp>
-      <p:sp>
-        <p:nvSpPr>
-          <p:cNvPr id="31" name="Text 29"/>
-          <p:cNvSpPr/>
-          <p:nvPr/>
-        </p:nvSpPr>
-        <p:spPr>
-          <a:xfrm>
-            <a:off x="914400" y="5623560"/>
-            <a:ext cx="10515600" cy="731520"/>
-          </a:xfrm>
-          <a:prstGeom prst="rect">
-            <a:avLst/>
-          </a:prstGeom>
-          <a:noFill/>
-          <a:ln/>
-        </p:spPr>
-        <p:txBody>
-          <a:bodyPr wrap="square" rtlCol="0" anchor="ctr"/>
-          <a:lstStyle/>
-          <a:p>
-            <a:pPr marL="0" indent="0">
-              <a:buNone/>
-            </a:pPr>
-            <a:r>
-              <a:rPr lang="en-US" sz="1300" b="1" dirty="0">
-                <a:solidFill>
-                  <a:srgbClr val="A44E36"/>
-                </a:solidFill>
-                <a:latin typeface="Cambria" pitchFamily="34" charset="0"/>
-                <a:ea typeface="Cambria" pitchFamily="34" charset="-122"/>
-                <a:cs typeface="Cambria" pitchFamily="34" charset="-120"/>
-              </a:rPr>
-              <a:t>四個容易翻車的地方　</a:t>
-            </a:r>
-            <a:r>
-              <a:rPr lang="en-US" sz="1300" dirty="0">
-                <a:solidFill>
-                  <a:srgbClr val="3A2E28"/>
-                </a:solidFill>
-                <a:latin typeface="Calibri" pitchFamily="34" charset="0"/>
-                <a:ea typeface="Calibri" pitchFamily="34" charset="-122"/>
-                <a:cs typeface="Calibri" pitchFamily="34" charset="-120"/>
-              </a:rPr>
-              <a:t>位移方向設反 · 亞音設錯 · 和鄰台輸入輸出打架 · 位移太小（它自己的發射會干擾自己的接收）。</a:t>
-            </a:r>
-            <a:endParaRPr lang="en-US" sz="1300" dirty="0"/>
-          </a:p>
-        </p:txBody>
-      </p:sp>
-    </p:spTree>
-  </p:cSld>
-  <p:clrMapOvr>
-    <a:masterClrMapping/>
-  </p:clrMapOvr>
-</p:sld>
-</file>
-
-<file path=ppt/slides/slide31.xml><?xml version="1.0" encoding="utf-8"?>
-<p:sld xmlns:a="http://schemas.openxmlformats.org/drawingml/2006/main" xmlns:r="http://schemas.openxmlformats.org/officeDocument/2006/relationships" xmlns:p="http://schemas.openxmlformats.org/presentationml/2006/main">
-  <p:cSld name="Slide 30">
-    <p:bg>
-      <p:bgPr>
-        <a:solidFill>
-          <a:srgbClr val="43312A"/>
-        </a:solidFill>
-        <a:effectLst/>
-      </p:bgPr>
-    </p:bg>
-    <p:spTree>
-      <p:nvGrpSpPr>
-        <p:cNvPr id="1" name=""/>
-        <p:cNvGrpSpPr/>
-        <p:nvPr/>
-      </p:nvGrpSpPr>
-      <p:grpSpPr>
-        <a:xfrm>
-          <a:off x="0" y="0"/>
-          <a:ext cx="0" cy="0"/>
-          <a:chOff x="0" y="0"/>
-          <a:chExt cx="0" cy="0"/>
-        </a:xfrm>
-      </p:grpSpPr>
-      <p:sp>
-        <p:nvSpPr>
-          <p:cNvPr id="2" name="Shape 0"/>
-          <p:cNvSpPr/>
-          <p:nvPr/>
-        </p:nvSpPr>
-        <p:spPr>
-          <a:xfrm>
-            <a:off x="-1463040" y="-1463040"/>
-            <a:ext cx="3840480" cy="3840480"/>
-          </a:xfrm>
-          <a:prstGeom prst="ellipse">
-            <a:avLst/>
-          </a:prstGeom>
-          <a:solidFill>
-            <a:srgbClr val="5A4038"/>
-          </a:solidFill>
-          <a:ln/>
-        </p:spPr>
-      </p:sp>
-      <p:sp>
-        <p:nvSpPr>
-          <p:cNvPr id="3" name="Shape 1"/>
-          <p:cNvSpPr/>
-          <p:nvPr/>
-        </p:nvSpPr>
-        <p:spPr>
-          <a:xfrm>
-            <a:off x="10058400" y="4572000"/>
-            <a:ext cx="4206240" cy="4206240"/>
-          </a:xfrm>
-          <a:prstGeom prst="ellipse">
-            <a:avLst/>
-          </a:prstGeom>
-          <a:solidFill>
-            <a:srgbClr val="3A2A23"/>
-          </a:solidFill>
-          <a:ln/>
-        </p:spPr>
-      </p:sp>
-      <p:sp>
-        <p:nvSpPr>
-          <p:cNvPr id="4" name="Text 2"/>
-          <p:cNvSpPr/>
-          <p:nvPr/>
-        </p:nvSpPr>
-        <p:spPr>
-          <a:xfrm>
-            <a:off x="1005840" y="1965960"/>
-            <a:ext cx="10058400" cy="457200"/>
-          </a:xfrm>
-          <a:prstGeom prst="rect">
-            <a:avLst/>
-          </a:prstGeom>
-          <a:noFill/>
-          <a:ln/>
-        </p:spPr>
-        <p:txBody>
-          <a:bodyPr wrap="square" rtlCol="0" anchor="ctr"/>
-          <a:lstStyle/>
-          <a:p>
-            <a:pPr marL="0" indent="0">
-              <a:buNone/>
-            </a:pPr>
-            <a:r>
-              <a:rPr lang="en-US" sz="1700" b="1" kern="0" spc="300" dirty="0">
-                <a:solidFill>
-                  <a:srgbClr val="D99A5B"/>
-                </a:solidFill>
-                <a:latin typeface="Calibri" pitchFamily="34" charset="0"/>
-                <a:ea typeface="Calibri" pitchFamily="34" charset="-122"/>
-                <a:cs typeface="Calibri" pitchFamily="34" charset="-120"/>
-              </a:rPr>
-              <a:t>SESSION 6</a:t>
-            </a:r>
-            <a:endParaRPr lang="en-US" sz="1700" dirty="0"/>
-          </a:p>
-        </p:txBody>
-      </p:sp>
-      <p:sp>
-        <p:nvSpPr>
-          <p:cNvPr id="5" name="Text 3"/>
-          <p:cNvSpPr/>
-          <p:nvPr/>
-        </p:nvSpPr>
-        <p:spPr>
-          <a:xfrm>
-            <a:off x="960120" y="2377440"/>
-            <a:ext cx="10241280" cy="1280160"/>
-          </a:xfrm>
-          <a:prstGeom prst="rect">
-            <a:avLst/>
-          </a:prstGeom>
-          <a:noFill/>
-          <a:ln/>
-        </p:spPr>
-        <p:txBody>
-          <a:bodyPr wrap="square" rtlCol="0" anchor="ctr"/>
-          <a:lstStyle/>
-          <a:p>
-            <a:pPr marL="0" indent="0">
-              <a:buNone/>
-            </a:pPr>
-            <a:r>
-              <a:rPr lang="en-US" sz="4600" b="1" dirty="0">
-                <a:solidFill>
-                  <a:srgbClr val="FBF7F2"/>
-                </a:solidFill>
-                <a:latin typeface="Cambria" pitchFamily="34" charset="0"/>
-                <a:ea typeface="Cambria" pitchFamily="34" charset="-122"/>
-                <a:cs typeface="Cambria" pitchFamily="34" charset="-120"/>
-              </a:rPr>
-              <a:t>亞音 CTCSS</a:t>
-            </a:r>
-            <a:endParaRPr lang="en-US" sz="4600" dirty="0"/>
-          </a:p>
-        </p:txBody>
-      </p:sp>
-      <p:sp>
-        <p:nvSpPr>
-          <p:cNvPr id="6" name="Text 4"/>
-          <p:cNvSpPr/>
-          <p:nvPr/>
-        </p:nvSpPr>
-        <p:spPr>
-          <a:xfrm>
-            <a:off x="1005840" y="3657600"/>
-            <a:ext cx="9875520" cy="548640"/>
-          </a:xfrm>
-          <a:prstGeom prst="rect">
-            <a:avLst/>
-          </a:prstGeom>
-          <a:noFill/>
-          <a:ln/>
-        </p:spPr>
-        <p:txBody>
-          <a:bodyPr wrap="square" rtlCol="0" anchor="ctr"/>
-          <a:lstStyle/>
-          <a:p>
-            <a:pPr marL="0" indent="0">
-              <a:buNone/>
-            </a:pPr>
-            <a:r>
-              <a:rPr lang="en-US" sz="1700" dirty="0">
-                <a:solidFill>
-                  <a:srgbClr val="D9C7B8"/>
-                </a:solidFill>
-                <a:latin typeface="Calibri" pitchFamily="34" charset="0"/>
-                <a:ea typeface="Calibri" pitchFamily="34" charset="-122"/>
-                <a:cs typeface="Calibri" pitchFamily="34" charset="-120"/>
-              </a:rPr>
-              <a:t>重點：亞音不是加密</a:t>
-            </a:r>
-            <a:endParaRPr lang="en-US" sz="1700" dirty="0"/>
-          </a:p>
-        </p:txBody>
-      </p:sp>
-      <p:sp>
-        <p:nvSpPr>
-          <p:cNvPr id="7" name="Shape 5"/>
-          <p:cNvSpPr/>
-          <p:nvPr/>
-        </p:nvSpPr>
-        <p:spPr>
-          <a:xfrm>
-            <a:off x="1005840" y="4480560"/>
-            <a:ext cx="9966960" cy="896112"/>
-          </a:xfrm>
-          <a:prstGeom prst="roundRect">
-            <a:avLst>
-              <a:gd name="adj" fmla="val 12245"/>
-            </a:avLst>
-          </a:prstGeom>
-          <a:solidFill>
-            <a:srgbClr val="3A2A23"/>
-          </a:solidFill>
-          <a:ln/>
-          <a:effectLst>
-            <a:outerShdw blurRad="114300" dist="50800" dir="5400000" algn="bl" rotWithShape="0">
-              <a:srgbClr val="6B4A3A">
-                <a:alpha val="28000"/>
-              </a:srgbClr>
-            </a:outerShdw>
-          </a:effectLst>
-        </p:spPr>
-      </p:sp>
-      <p:sp>
-        <p:nvSpPr>
-          <p:cNvPr id="8" name="Text 6"/>
-          <p:cNvSpPr/>
-          <p:nvPr/>
-        </p:nvSpPr>
-        <p:spPr>
-          <a:xfrm>
-            <a:off x="1234440" y="4599432"/>
-            <a:ext cx="1828800" cy="292608"/>
-          </a:xfrm>
-          <a:prstGeom prst="rect">
-            <a:avLst/>
-          </a:prstGeom>
-          <a:noFill/>
-          <a:ln/>
-        </p:spPr>
-        <p:txBody>
-          <a:bodyPr wrap="square" rtlCol="0" anchor="ctr"/>
-          <a:lstStyle/>
-          <a:p>
-            <a:pPr marL="0" indent="0">
-              <a:buNone/>
-            </a:pPr>
-            <a:r>
-              <a:rPr lang="en-US" sz="1200" b="1" kern="0" spc="100" dirty="0">
-                <a:solidFill>
-                  <a:srgbClr val="D99A5B"/>
-                </a:solidFill>
-                <a:latin typeface="Calibri" pitchFamily="34" charset="0"/>
-                <a:ea typeface="Calibri" pitchFamily="34" charset="-122"/>
-                <a:cs typeface="Calibri" pitchFamily="34" charset="-120"/>
-              </a:rPr>
-              <a:t>破除迷思</a:t>
-            </a:r>
-            <a:endParaRPr lang="en-US" sz="1200" dirty="0"/>
-          </a:p>
-        </p:txBody>
-      </p:sp>
-      <p:sp>
-        <p:nvSpPr>
-          <p:cNvPr id="9" name="Text 7"/>
-          <p:cNvSpPr/>
-          <p:nvPr/>
-        </p:nvSpPr>
-        <p:spPr>
-          <a:xfrm>
-            <a:off x="1234440" y="4864608"/>
-            <a:ext cx="9509760" cy="457200"/>
-          </a:xfrm>
-          <a:prstGeom prst="rect">
-            <a:avLst/>
-          </a:prstGeom>
-          <a:noFill/>
-          <a:ln/>
-        </p:spPr>
-        <p:txBody>
-          <a:bodyPr wrap="square" rtlCol="0" anchor="ctr"/>
-          <a:lstStyle/>
-          <a:p>
-            <a:pPr marL="0" indent="0">
-              <a:buNone/>
-            </a:pPr>
-            <a:r>
-              <a:rPr lang="en-US" sz="1600" i="1" strike="sngStrike" dirty="0">
-                <a:solidFill>
-                  <a:srgbClr val="C9A99A"/>
-                </a:solidFill>
-                <a:latin typeface="Calibri" pitchFamily="34" charset="0"/>
-                <a:ea typeface="Calibri" pitchFamily="34" charset="-122"/>
-                <a:cs typeface="Calibri" pitchFamily="34" charset="-120"/>
-              </a:rPr>
-              <a:t>「設了亞音＝私人頻道，別人聽不到」</a:t>
-            </a:r>
-            <a:r>
-              <a:rPr lang="en-US" sz="1600" dirty="0">
-                <a:solidFill>
-                  <a:srgbClr val="8C7A6E"/>
-                </a:solidFill>
-                <a:latin typeface="Calibri" pitchFamily="34" charset="0"/>
-                <a:ea typeface="Calibri" pitchFamily="34" charset="-122"/>
-                <a:cs typeface="Calibri" pitchFamily="34" charset="-120"/>
-              </a:rPr>
-              <a:t>　→　</a:t>
-            </a:r>
-            <a:r>
-              <a:rPr lang="en-US" sz="1700" b="1" dirty="0">
-                <a:solidFill>
-                  <a:srgbClr val="FBF7F2"/>
-                </a:solidFill>
-                <a:latin typeface="Cambria" pitchFamily="34" charset="0"/>
-                <a:ea typeface="Cambria" pitchFamily="34" charset="-122"/>
-                <a:cs typeface="Cambria" pitchFamily="34" charset="-120"/>
-              </a:rPr>
-              <a:t>它一點都不加密，只關你自己的喇叭</a:t>
-            </a:r>
-            <a:endParaRPr lang="en-US" sz="1600" dirty="0"/>
-          </a:p>
-        </p:txBody>
-      </p:sp>
-    </p:spTree>
-  </p:cSld>
-  <p:clrMapOvr>
-    <a:masterClrMapping/>
-  </p:clrMapOvr>
-</p:sld>
-</file>
-
-<file path=ppt/slides/slide32.xml><?xml version="1.0" encoding="utf-8"?>
-<p:sld xmlns:a="http://schemas.openxmlformats.org/drawingml/2006/main" xmlns:r="http://schemas.openxmlformats.org/officeDocument/2006/relationships" xmlns:p="http://schemas.openxmlformats.org/presentationml/2006/main">
   <p:cSld name="Slide 31">
     <p:bg>
       <p:bgPr>
@@ -24799,7 +22355,7 @@
 </p:sld>
 </file>
 
-<file path=ppt/slides/slide33.xml><?xml version="1.0" encoding="utf-8"?>
+<file path=ppt/slides/slide31.xml><?xml version="1.0" encoding="utf-8"?>
 <p:sld xmlns:a="http://schemas.openxmlformats.org/drawingml/2006/main" xmlns:r="http://schemas.openxmlformats.org/officeDocument/2006/relationships" xmlns:p="http://schemas.openxmlformats.org/presentationml/2006/main">
   <p:cSld name="Slide 32">
     <p:bg>
@@ -25469,7 +23025,7 @@
 </p:sld>
 </file>
 
-<file path=ppt/slides/slide34.xml><?xml version="1.0" encoding="utf-8"?>
+<file path=ppt/slides/slide32.xml><?xml version="1.0" encoding="utf-8"?>
 <p:sld xmlns:a="http://schemas.openxmlformats.org/drawingml/2006/main" xmlns:r="http://schemas.openxmlformats.org/officeDocument/2006/relationships" xmlns:p="http://schemas.openxmlformats.org/presentationml/2006/main">
   <p:cSld name="Slide 33">
     <p:bg>
@@ -25932,6 +23488,1301 @@
               <a:t>通聯紀律：人員位置、傷患個資、物資數量——設了亞音也一樣不能明語講。</a:t>
             </a:r>
             <a:endParaRPr lang="en-US" sz="1400" dirty="0"/>
+          </a:p>
+        </p:txBody>
+      </p:sp>
+    </p:spTree>
+  </p:cSld>
+  <p:clrMapOvr>
+    <a:masterClrMapping/>
+  </p:clrMapOvr>
+</p:sld>
+</file>
+
+<file path=ppt/slides/slide33.xml><?xml version="1.0" encoding="utf-8"?>
+<p:sld xmlns:a="http://schemas.openxmlformats.org/drawingml/2006/main" xmlns:r="http://schemas.openxmlformats.org/officeDocument/2006/relationships" xmlns:p="http://schemas.openxmlformats.org/presentationml/2006/main">
+  <p:cSld>
+    <p:bg>
+      <p:bgPr>
+        <a:solidFill>
+          <a:srgbClr val="43312A"/>
+        </a:solidFill>
+        <a:effectLst/>
+      </p:bgPr>
+    </p:bg>
+    <p:spTree>
+      <p:nvGrpSpPr>
+        <p:cNvPr id="1" name=""/>
+        <p:cNvGrpSpPr/>
+        <p:nvPr/>
+      </p:nvGrpSpPr>
+      <p:grpSpPr>
+        <a:xfrm>
+          <a:off x="0" y="0"/>
+          <a:ext cx="0" cy="0"/>
+          <a:chOff x="0" y="0"/>
+          <a:chExt cx="0" cy="0"/>
+        </a:xfrm>
+      </p:grpSpPr>
+      <p:sp>
+        <p:nvSpPr>
+          <p:cNvPr id="2" name="Shape 0"/>
+          <p:cNvSpPr/>
+          <p:nvPr/>
+        </p:nvSpPr>
+        <p:spPr>
+          <a:xfrm>
+            <a:off x="-1463040" y="-1463040"/>
+            <a:ext cx="3840480" cy="3840480"/>
+          </a:xfrm>
+          <a:prstGeom prst="ellipse">
+            <a:avLst/>
+          </a:prstGeom>
+          <a:solidFill>
+            <a:srgbClr val="5A4038"/>
+          </a:solidFill>
+          <a:ln/>
+        </p:spPr>
+        <p:txBody>
+          <a:bodyPr/>
+          <a:lstStyle/>
+          <a:p>
+            <a:endParaRPr/>
+          </a:p>
+        </p:txBody>
+      </p:sp>
+      <p:sp>
+        <p:nvSpPr>
+          <p:cNvPr id="3" name="Shape 1"/>
+          <p:cNvSpPr/>
+          <p:nvPr/>
+        </p:nvSpPr>
+        <p:spPr>
+          <a:xfrm>
+            <a:off x="10058400" y="4572000"/>
+            <a:ext cx="4206240" cy="4206240"/>
+          </a:xfrm>
+          <a:prstGeom prst="ellipse">
+            <a:avLst/>
+          </a:prstGeom>
+          <a:solidFill>
+            <a:srgbClr val="3A2A23"/>
+          </a:solidFill>
+          <a:ln/>
+        </p:spPr>
+        <p:txBody>
+          <a:bodyPr/>
+          <a:lstStyle/>
+          <a:p>
+            <a:endParaRPr/>
+          </a:p>
+        </p:txBody>
+      </p:sp>
+      <p:sp>
+        <p:nvSpPr>
+          <p:cNvPr id="4" name="Text 2"/>
+          <p:cNvSpPr/>
+          <p:nvPr/>
+        </p:nvSpPr>
+        <p:spPr>
+          <a:xfrm>
+            <a:off x="1005840" y="1965960"/>
+            <a:ext cx="10058400" cy="457200"/>
+          </a:xfrm>
+          <a:prstGeom prst="rect">
+            <a:avLst/>
+          </a:prstGeom>
+          <a:noFill/>
+          <a:ln/>
+        </p:spPr>
+        <p:txBody>
+          <a:bodyPr wrap="square" rtlCol="0" anchor="ctr"/>
+          <a:lstStyle/>
+          <a:p>
+            <a:pPr marL="0" indent="0">
+              <a:buNone/>
+            </a:pPr>
+            <a:r>
+              <a:rPr lang="en-US" sz="1700" b="1" kern="0" spc="300" dirty="0">
+                <a:solidFill>
+                  <a:srgbClr val="D99A5B"/>
+                </a:solidFill>
+                <a:latin typeface="Calibri" pitchFamily="34" charset="0"/>
+                <a:ea typeface="Calibri" pitchFamily="34" charset="-122"/>
+                <a:cs typeface="Calibri" pitchFamily="34" charset="-120"/>
+              </a:rPr>
+              <a:t>想一想</a:t>
+            </a:r>
+            <a:endParaRPr lang="en-US" sz="1700" dirty="0"/>
+          </a:p>
+        </p:txBody>
+      </p:sp>
+      <p:sp>
+        <p:nvSpPr>
+          <p:cNvPr id="5" name="Text 3"/>
+          <p:cNvSpPr/>
+          <p:nvPr/>
+        </p:nvSpPr>
+        <p:spPr>
+          <a:xfrm>
+            <a:off x="960120" y="2377440"/>
+            <a:ext cx="10241280" cy="1280160"/>
+          </a:xfrm>
+          <a:prstGeom prst="rect">
+            <a:avLst/>
+          </a:prstGeom>
+          <a:noFill/>
+          <a:ln/>
+        </p:spPr>
+        <p:txBody>
+          <a:bodyPr wrap="square" rtlCol="0" anchor="ctr"/>
+          <a:lstStyle/>
+          <a:p>
+            <a:pPr marL="0" indent="0">
+              <a:buNone/>
+            </a:pPr>
+            <a:r>
+              <a:rPr lang="en-US" sz="4600" b="1" dirty="0">
+                <a:solidFill>
+                  <a:srgbClr val="FBF7F2"/>
+                </a:solidFill>
+                <a:latin typeface="Cambria" pitchFamily="34" charset="0"/>
+                <a:ea typeface="Cambria" pitchFamily="34" charset="-122"/>
+                <a:cs typeface="Cambria" pitchFamily="34" charset="-120"/>
+              </a:rPr>
+              <a:t>架一座 2m 中繼台</a:t>
+            </a:r>
+            <a:endParaRPr lang="en-US" sz="4600" dirty="0"/>
+          </a:p>
+        </p:txBody>
+      </p:sp>
+      <p:sp>
+        <p:nvSpPr>
+          <p:cNvPr id="7" name="Shape 5"/>
+          <p:cNvSpPr/>
+          <p:nvPr/>
+        </p:nvSpPr>
+        <p:spPr>
+          <a:xfrm>
+            <a:off x="1005840" y="4480560"/>
+            <a:ext cx="9966960" cy="896112"/>
+          </a:xfrm>
+          <a:prstGeom prst="roundRect">
+            <a:avLst>
+              <a:gd name="adj" fmla="val 12245"/>
+            </a:avLst>
+          </a:prstGeom>
+          <a:solidFill>
+            <a:srgbClr val="3A2A23"/>
+          </a:solidFill>
+          <a:ln/>
+          <a:effectLst>
+            <a:outerShdw blurRad="114300" dist="50800" dir="5400000" algn="bl" rotWithShape="0">
+              <a:srgbClr val="6B4A3A">
+                <a:alpha val="28000"/>
+              </a:srgbClr>
+            </a:outerShdw>
+          </a:effectLst>
+        </p:spPr>
+        <p:txBody>
+          <a:bodyPr/>
+          <a:lstStyle/>
+          <a:p>
+            <a:endParaRPr/>
+          </a:p>
+        </p:txBody>
+      </p:sp>
+      <p:sp>
+        <p:nvSpPr>
+          <p:cNvPr id="8" name="Text 6"/>
+          <p:cNvSpPr/>
+          <p:nvPr/>
+        </p:nvSpPr>
+        <p:spPr>
+          <a:xfrm>
+            <a:off x="1234440" y="4599432"/>
+            <a:ext cx="1828800" cy="292608"/>
+          </a:xfrm>
+          <a:prstGeom prst="rect">
+            <a:avLst/>
+          </a:prstGeom>
+          <a:noFill/>
+          <a:ln/>
+        </p:spPr>
+        <p:txBody>
+          <a:bodyPr wrap="square" rtlCol="0" anchor="ctr"/>
+          <a:lstStyle/>
+          <a:p>
+            <a:pPr marL="0" indent="0">
+              <a:buNone/>
+            </a:pPr>
+            <a:r>
+              <a:rPr lang="en-US" sz="1200" b="1" kern="0" spc="100" dirty="0">
+                <a:solidFill>
+                  <a:srgbClr val="D99A5B"/>
+                </a:solidFill>
+                <a:latin typeface="Calibri" pitchFamily="34" charset="0"/>
+                <a:ea typeface="Calibri" pitchFamily="34" charset="-122"/>
+                <a:cs typeface="Calibri" pitchFamily="34" charset="-120"/>
+              </a:rPr>
+              <a:t>先想清楚</a:t>
+            </a:r>
+            <a:endParaRPr lang="en-US" sz="1200" dirty="0"/>
+          </a:p>
+        </p:txBody>
+      </p:sp>
+      <p:sp>
+        <p:nvSpPr>
+          <p:cNvPr id="6" name="Text 4"/>
+          <p:cNvSpPr/>
+          <p:nvPr/>
+        </p:nvSpPr>
+        <p:spPr>
+          <a:xfrm>
+            <a:off x="1188720" y="4834682"/>
+            <a:ext cx="9875520" cy="548640"/>
+          </a:xfrm>
+          <a:prstGeom prst="rect">
+            <a:avLst/>
+          </a:prstGeom>
+          <a:noFill/>
+          <a:ln/>
+        </p:spPr>
+        <p:txBody>
+          <a:bodyPr wrap="square" rtlCol="0" anchor="ctr"/>
+          <a:lstStyle/>
+          <a:p>
+            <a:pPr marL="0" indent="0">
+              <a:buNone/>
+            </a:pPr>
+            <a:r>
+              <a:rPr lang="en-US" sz="1700" dirty="0">
+                <a:solidFill>
+                  <a:srgbClr val="D9C7B8"/>
+                </a:solidFill>
+                <a:latin typeface="Calibri" pitchFamily="34" charset="0"/>
+                <a:ea typeface="Calibri" pitchFamily="34" charset="-122"/>
+                <a:cs typeface="Calibri" pitchFamily="34" charset="-120"/>
+              </a:rPr>
+              <a:t>最少要設定什麼，才能通話？</a:t>
+            </a:r>
+            <a:endParaRPr lang="en-US" sz="1700" dirty="0"/>
+          </a:p>
+        </p:txBody>
+      </p:sp>
+    </p:spTree>
+  </p:cSld>
+  <p:clrMapOvr>
+    <a:masterClrMapping/>
+  </p:clrMapOvr>
+</p:sld>
+</file>
+
+<file path=ppt/slides/slide34.xml><?xml version="1.0" encoding="utf-8"?>
+<p:sld xmlns:a="http://schemas.openxmlformats.org/drawingml/2006/main" xmlns:r="http://schemas.openxmlformats.org/officeDocument/2006/relationships" xmlns:p="http://schemas.openxmlformats.org/presentationml/2006/main">
+  <p:cSld name="Slide 29">
+    <p:bg>
+      <p:bgPr>
+        <a:solidFill>
+          <a:srgbClr val="FBF7F2"/>
+        </a:solidFill>
+        <a:effectLst/>
+      </p:bgPr>
+    </p:bg>
+    <p:spTree>
+      <p:nvGrpSpPr>
+        <p:cNvPr id="1" name=""/>
+        <p:cNvGrpSpPr/>
+        <p:nvPr/>
+      </p:nvGrpSpPr>
+      <p:grpSpPr>
+        <a:xfrm>
+          <a:off x="0" y="0"/>
+          <a:ext cx="0" cy="0"/>
+          <a:chOff x="0" y="0"/>
+          <a:chExt cx="0" cy="0"/>
+        </a:xfrm>
+      </p:grpSpPr>
+      <p:sp>
+        <p:nvSpPr>
+          <p:cNvPr id="2" name="Text 0"/>
+          <p:cNvSpPr/>
+          <p:nvPr/>
+        </p:nvSpPr>
+        <p:spPr>
+          <a:xfrm>
+            <a:off x="640080" y="384048"/>
+            <a:ext cx="10058400" cy="365760"/>
+          </a:xfrm>
+          <a:prstGeom prst="rect">
+            <a:avLst/>
+          </a:prstGeom>
+          <a:noFill/>
+          <a:ln/>
+        </p:spPr>
+        <p:txBody>
+          <a:bodyPr wrap="square" rtlCol="0" anchor="ctr"/>
+          <a:lstStyle/>
+          <a:p>
+            <a:pPr marL="0" indent="0">
+              <a:buNone/>
+            </a:pPr>
+            <a:r>
+              <a:rPr lang="en-US" sz="1400" b="1" kern="0" spc="200" dirty="0">
+                <a:solidFill>
+                  <a:srgbClr val="A44E36"/>
+                </a:solidFill>
+                <a:latin typeface="Calibri" pitchFamily="34" charset="0"/>
+                <a:ea typeface="Calibri" pitchFamily="34" charset="-122"/>
+                <a:cs typeface="Calibri" pitchFamily="34" charset="-120"/>
+              </a:rPr>
+              <a:t>想一想 · 綜合設計</a:t>
+            </a:r>
+            <a:endParaRPr lang="en-US" sz="1400" dirty="0"/>
+          </a:p>
+        </p:txBody>
+      </p:sp>
+      <p:sp>
+        <p:nvSpPr>
+          <p:cNvPr id="3" name="Text 1"/>
+          <p:cNvSpPr/>
+          <p:nvPr/>
+        </p:nvSpPr>
+        <p:spPr>
+          <a:xfrm>
+            <a:off x="603504" y="713232"/>
+            <a:ext cx="10972800" cy="777240"/>
+          </a:xfrm>
+          <a:prstGeom prst="rect">
+            <a:avLst/>
+          </a:prstGeom>
+          <a:noFill/>
+          <a:ln/>
+        </p:spPr>
+        <p:txBody>
+          <a:bodyPr wrap="square" rtlCol="0" anchor="ctr"/>
+          <a:lstStyle/>
+          <a:p>
+            <a:pPr marL="0" indent="0">
+              <a:buNone/>
+            </a:pPr>
+            <a:r>
+              <a:rPr lang="en-US" sz="3200" b="1" dirty="0">
+                <a:solidFill>
+                  <a:srgbClr val="3A2E28"/>
+                </a:solidFill>
+                <a:latin typeface="Cambria" pitchFamily="34" charset="0"/>
+                <a:ea typeface="Cambria" pitchFamily="34" charset="-122"/>
+                <a:cs typeface="Cambria" pitchFamily="34" charset="-120"/>
+              </a:rPr>
+              <a:t>換你設計：架一座 2m 中繼台</a:t>
+            </a:r>
+            <a:endParaRPr lang="en-US" sz="3200" dirty="0"/>
+          </a:p>
+        </p:txBody>
+      </p:sp>
+      <p:sp>
+        <p:nvSpPr>
+          <p:cNvPr id="4" name="Rounded Rectangle 3"/>
+          <p:cNvSpPr/>
+          <p:nvPr/>
+        </p:nvSpPr>
+        <p:spPr>
+          <a:xfrm>
+            <a:off x="640080" y="1371600"/>
+            <a:ext cx="10927080" cy="841248"/>
+          </a:xfrm>
+          <a:prstGeom prst="roundRect">
+            <a:avLst/>
+          </a:prstGeom>
+          <a:solidFill>
+            <a:srgbClr val="F3EADF"/>
+          </a:solidFill>
+          <a:ln>
+            <a:noFill/>
+          </a:ln>
+          <a:effectLst/>
+        </p:spPr>
+        <p:style>
+          <a:lnRef idx="1">
+            <a:schemeClr val="accent1"/>
+          </a:lnRef>
+          <a:fillRef idx="3">
+            <a:schemeClr val="accent1"/>
+          </a:fillRef>
+          <a:effectRef idx="2">
+            <a:schemeClr val="accent1"/>
+          </a:effectRef>
+          <a:fontRef idx="minor">
+            <a:schemeClr val="lt1"/>
+          </a:fontRef>
+        </p:style>
+        <p:txBody>
+          <a:bodyPr wrap="square" lIns="54864" tIns="27432" rIns="54864" bIns="27432" rtlCol="0" anchor="ctr"/>
+          <a:lstStyle/>
+          <a:p>
+            <a:pPr algn="l"/>
+            <a:r>
+              <a:rPr b="1" i="0" smtClean="0">
+                <a:solidFill>
+                  <a:srgbClr val="8C7A6E"/>
+                </a:solidFill>
+              </a:rPr>
+              <a:t>中繼台「</a:t>
+            </a:r>
+            <a:r>
+              <a:rPr b="1" i="0" dirty="0" err="1">
+                <a:solidFill>
+                  <a:srgbClr val="8C7A6E"/>
+                </a:solidFill>
+              </a:rPr>
+              <a:t>同時收、同時發</a:t>
+            </a:r>
+            <a:r>
+              <a:rPr b="1" i="0" dirty="0" smtClean="0">
+                <a:solidFill>
+                  <a:srgbClr val="8C7A6E"/>
+                </a:solidFill>
+              </a:rPr>
+              <a:t>」</a:t>
+            </a:r>
+            <a:r>
+              <a:rPr lang="zh-TW" altLang="en-US" b="1" dirty="0" smtClean="0">
+                <a:solidFill>
+                  <a:srgbClr val="8C7A6E"/>
+                </a:solidFill>
+              </a:rPr>
+              <a:t>。</a:t>
+            </a:r>
+            <a:r>
+              <a:rPr b="1" i="0" dirty="0" err="1" smtClean="0">
+                <a:solidFill>
+                  <a:srgbClr val="8C7A6E"/>
+                </a:solidFill>
+              </a:rPr>
+              <a:t>先想清楚</a:t>
+            </a:r>
+            <a:r>
+              <a:rPr b="1" i="0" dirty="0" err="1">
+                <a:solidFill>
+                  <a:srgbClr val="8C7A6E"/>
+                </a:solidFill>
+              </a:rPr>
+              <a:t>：最少要設定什麼才能通話？</a:t>
+            </a:r>
+            <a:r>
+              <a:rPr b="1" i="0" dirty="0" err="1" smtClean="0">
+                <a:solidFill>
+                  <a:srgbClr val="8C7A6E"/>
+                </a:solidFill>
+              </a:rPr>
+              <a:t>再把每個參數填進圖裡</a:t>
+            </a:r>
+            <a:endParaRPr b="1" i="0" dirty="0">
+              <a:solidFill>
+                <a:srgbClr val="8C7A6E"/>
+              </a:solidFill>
+            </a:endParaRPr>
+          </a:p>
+        </p:txBody>
+      </p:sp>
+      <p:sp>
+        <p:nvSpPr>
+          <p:cNvPr id="5" name="Rounded Rectangle 4"/>
+          <p:cNvSpPr/>
+          <p:nvPr/>
+        </p:nvSpPr>
+        <p:spPr>
+          <a:xfrm>
+            <a:off x="5349240" y="2286000"/>
+            <a:ext cx="1508760" cy="658368"/>
+          </a:xfrm>
+          <a:prstGeom prst="roundRect">
+            <a:avLst/>
+          </a:prstGeom>
+          <a:solidFill>
+            <a:srgbClr val="43312A"/>
+          </a:solidFill>
+          <a:ln>
+            <a:noFill/>
+          </a:ln>
+          <a:effectLst/>
+        </p:spPr>
+        <p:style>
+          <a:lnRef idx="1">
+            <a:schemeClr val="accent1"/>
+          </a:lnRef>
+          <a:fillRef idx="3">
+            <a:schemeClr val="accent1"/>
+          </a:fillRef>
+          <a:effectRef idx="2">
+            <a:schemeClr val="accent1"/>
+          </a:effectRef>
+          <a:fontRef idx="minor">
+            <a:schemeClr val="lt1"/>
+          </a:fontRef>
+        </p:style>
+        <p:txBody>
+          <a:bodyPr wrap="square" lIns="54864" tIns="27432" rIns="54864" bIns="27432" rtlCol="0" anchor="ctr"/>
+          <a:lstStyle/>
+          <a:p>
+            <a:pPr algn="ctr"/>
+            <a:r>
+              <a:rPr sz="1400" b="1" i="0">
+                <a:solidFill>
+                  <a:srgbClr val="FFFFFF"/>
+                </a:solidFill>
+                <a:latin typeface="Cambria"/>
+              </a:rPr>
+              <a:t>中繼台</a:t>
+            </a:r>
+          </a:p>
+          <a:p>
+            <a:pPr algn="ctr"/>
+            <a:r>
+              <a:rPr sz="900" b="0" i="0">
+                <a:solidFill>
+                  <a:srgbClr val="FBF7F2"/>
+                </a:solidFill>
+                <a:latin typeface="Calibri"/>
+              </a:rPr>
+              <a:t>同時收＋發</a:t>
+            </a:r>
+          </a:p>
+        </p:txBody>
+      </p:sp>
+      <p:cxnSp>
+        <p:nvCxnSpPr>
+          <p:cNvPr id="6" name="Connector 5"/>
+          <p:cNvCxnSpPr/>
+          <p:nvPr/>
+        </p:nvCxnSpPr>
+        <p:spPr>
+          <a:xfrm flipV="1">
+            <a:off x="6103620" y="1938528"/>
+            <a:ext cx="0" cy="347472"/>
+          </a:xfrm>
+          <a:prstGeom prst="line">
+            <a:avLst/>
+          </a:prstGeom>
+          <a:ln w="25400">
+            <a:solidFill>
+              <a:srgbClr val="43312A"/>
+            </a:solidFill>
+          </a:ln>
+        </p:spPr>
+        <p:style>
+          <a:lnRef idx="2">
+            <a:schemeClr val="accent1"/>
+          </a:lnRef>
+          <a:fillRef idx="0">
+            <a:schemeClr val="accent1"/>
+          </a:fillRef>
+          <a:effectRef idx="1">
+            <a:schemeClr val="accent1"/>
+          </a:effectRef>
+          <a:fontRef idx="minor">
+            <a:schemeClr val="tx1"/>
+          </a:fontRef>
+        </p:style>
+      </p:cxnSp>
+      <p:sp>
+        <p:nvSpPr>
+          <p:cNvPr id="7" name="Oval 6"/>
+          <p:cNvSpPr/>
+          <p:nvPr/>
+        </p:nvSpPr>
+        <p:spPr>
+          <a:xfrm>
+            <a:off x="6012180" y="1810512"/>
+            <a:ext cx="182880" cy="182880"/>
+          </a:xfrm>
+          <a:prstGeom prst="ellipse">
+            <a:avLst/>
+          </a:prstGeom>
+          <a:solidFill>
+            <a:srgbClr val="A44E36"/>
+          </a:solidFill>
+          <a:ln>
+            <a:noFill/>
+          </a:ln>
+          <a:effectLst/>
+        </p:spPr>
+        <p:style>
+          <a:lnRef idx="1">
+            <a:schemeClr val="accent1"/>
+          </a:lnRef>
+          <a:fillRef idx="3">
+            <a:schemeClr val="accent1"/>
+          </a:fillRef>
+          <a:effectRef idx="2">
+            <a:schemeClr val="accent1"/>
+          </a:effectRef>
+          <a:fontRef idx="minor">
+            <a:schemeClr val="lt1"/>
+          </a:fontRef>
+        </p:style>
+        <p:txBody>
+          <a:bodyPr rtlCol="0" anchor="ctr"/>
+          <a:lstStyle/>
+          <a:p>
+            <a:pPr algn="ctr"/>
+            <a:endParaRPr/>
+          </a:p>
+        </p:txBody>
+      </p:sp>
+      <p:sp>
+        <p:nvSpPr>
+          <p:cNvPr id="8" name="Rounded Rectangle 7"/>
+          <p:cNvSpPr/>
+          <p:nvPr/>
+        </p:nvSpPr>
+        <p:spPr>
+          <a:xfrm>
+            <a:off x="822960" y="3703320"/>
+            <a:ext cx="1600200" cy="822960"/>
+          </a:xfrm>
+          <a:prstGeom prst="roundRect">
+            <a:avLst/>
+          </a:prstGeom>
+          <a:solidFill>
+            <a:srgbClr val="FFFFFF"/>
+          </a:solidFill>
+          <a:ln w="19050">
+            <a:solidFill>
+              <a:srgbClr val="C0674A"/>
+            </a:solidFill>
+          </a:ln>
+          <a:effectLst/>
+        </p:spPr>
+        <p:style>
+          <a:lnRef idx="1">
+            <a:schemeClr val="accent1"/>
+          </a:lnRef>
+          <a:fillRef idx="3">
+            <a:schemeClr val="accent1"/>
+          </a:fillRef>
+          <a:effectRef idx="2">
+            <a:schemeClr val="accent1"/>
+          </a:effectRef>
+          <a:fontRef idx="minor">
+            <a:schemeClr val="lt1"/>
+          </a:fontRef>
+        </p:style>
+        <p:txBody>
+          <a:bodyPr wrap="square" lIns="54864" tIns="27432" rIns="54864" bIns="27432" rtlCol="0" anchor="ctr"/>
+          <a:lstStyle/>
+          <a:p>
+            <a:pPr algn="ctr"/>
+            <a:r>
+              <a:rPr sz="1200" b="1" i="0">
+                <a:solidFill>
+                  <a:srgbClr val="A44E36"/>
+                </a:solidFill>
+                <a:latin typeface="Cambria"/>
+              </a:rPr>
+              <a:t>無線電 A</a:t>
+            </a:r>
+          </a:p>
+          <a:p>
+            <a:pPr algn="ctr"/>
+            <a:r>
+              <a:rPr sz="900" b="0" i="0">
+                <a:solidFill>
+                  <a:srgbClr val="8C7A6E"/>
+                </a:solidFill>
+                <a:latin typeface="Calibri"/>
+              </a:rPr>
+              <a:t>發話方</a:t>
+            </a:r>
+          </a:p>
+        </p:txBody>
+      </p:sp>
+      <p:sp>
+        <p:nvSpPr>
+          <p:cNvPr id="9" name="Rounded Rectangle 8"/>
+          <p:cNvSpPr/>
+          <p:nvPr/>
+        </p:nvSpPr>
+        <p:spPr>
+          <a:xfrm>
+            <a:off x="9765792" y="3703320"/>
+            <a:ext cx="1600200" cy="822960"/>
+          </a:xfrm>
+          <a:prstGeom prst="roundRect">
+            <a:avLst/>
+          </a:prstGeom>
+          <a:solidFill>
+            <a:srgbClr val="FFFFFF"/>
+          </a:solidFill>
+          <a:ln w="19050">
+            <a:solidFill>
+              <a:srgbClr val="8AA08C"/>
+            </a:solidFill>
+          </a:ln>
+          <a:effectLst/>
+        </p:spPr>
+        <p:style>
+          <a:lnRef idx="1">
+            <a:schemeClr val="accent1"/>
+          </a:lnRef>
+          <a:fillRef idx="3">
+            <a:schemeClr val="accent1"/>
+          </a:fillRef>
+          <a:effectRef idx="2">
+            <a:schemeClr val="accent1"/>
+          </a:effectRef>
+          <a:fontRef idx="minor">
+            <a:schemeClr val="lt1"/>
+          </a:fontRef>
+        </p:style>
+        <p:txBody>
+          <a:bodyPr wrap="square" lIns="54864" tIns="27432" rIns="54864" bIns="27432" rtlCol="0" anchor="ctr"/>
+          <a:lstStyle/>
+          <a:p>
+            <a:pPr algn="ctr"/>
+            <a:r>
+              <a:rPr sz="1200" b="1" i="0">
+                <a:solidFill>
+                  <a:srgbClr val="63795C"/>
+                </a:solidFill>
+                <a:latin typeface="Cambria"/>
+              </a:rPr>
+              <a:t>無線電 B</a:t>
+            </a:r>
+          </a:p>
+          <a:p>
+            <a:pPr algn="ctr"/>
+            <a:r>
+              <a:rPr sz="900" b="0" i="0">
+                <a:solidFill>
+                  <a:srgbClr val="8C7A6E"/>
+                </a:solidFill>
+                <a:latin typeface="Calibri"/>
+              </a:rPr>
+              <a:t>收聽方</a:t>
+            </a:r>
+          </a:p>
+        </p:txBody>
+      </p:sp>
+      <p:cxnSp>
+        <p:nvCxnSpPr>
+          <p:cNvPr id="10" name="Connector 9"/>
+          <p:cNvCxnSpPr/>
+          <p:nvPr/>
+        </p:nvCxnSpPr>
+        <p:spPr>
+          <a:xfrm flipV="1">
+            <a:off x="2377440" y="2788920"/>
+            <a:ext cx="2926080" cy="1005840"/>
+          </a:xfrm>
+          <a:prstGeom prst="line">
+            <a:avLst/>
+          </a:prstGeom>
+          <a:ln w="31750">
+            <a:solidFill>
+              <a:srgbClr val="C0674A"/>
+            </a:solidFill>
+            <a:tailEnd type="triangle" w="lg" len="lg"/>
+          </a:ln>
+          <a:effectLst/>
+        </p:spPr>
+        <p:style>
+          <a:lnRef idx="2">
+            <a:schemeClr val="accent1"/>
+          </a:lnRef>
+          <a:fillRef idx="0">
+            <a:schemeClr val="accent1"/>
+          </a:fillRef>
+          <a:effectRef idx="1">
+            <a:schemeClr val="accent1"/>
+          </a:effectRef>
+          <a:fontRef idx="minor">
+            <a:schemeClr val="tx1"/>
+          </a:fontRef>
+        </p:style>
+      </p:cxnSp>
+      <p:cxnSp>
+        <p:nvCxnSpPr>
+          <p:cNvPr id="11" name="Connector 10"/>
+          <p:cNvCxnSpPr/>
+          <p:nvPr/>
+        </p:nvCxnSpPr>
+        <p:spPr>
+          <a:xfrm>
+            <a:off x="6903720" y="2788920"/>
+            <a:ext cx="2926080" cy="1005840"/>
+          </a:xfrm>
+          <a:prstGeom prst="line">
+            <a:avLst/>
+          </a:prstGeom>
+          <a:ln w="31750">
+            <a:solidFill>
+              <a:srgbClr val="8AA08C"/>
+            </a:solidFill>
+            <a:tailEnd type="triangle" w="lg" len="lg"/>
+          </a:ln>
+          <a:effectLst/>
+        </p:spPr>
+        <p:style>
+          <a:lnRef idx="2">
+            <a:schemeClr val="accent1"/>
+          </a:lnRef>
+          <a:fillRef idx="0">
+            <a:schemeClr val="accent1"/>
+          </a:fillRef>
+          <a:effectRef idx="1">
+            <a:schemeClr val="accent1"/>
+          </a:effectRef>
+          <a:fontRef idx="minor">
+            <a:schemeClr val="tx1"/>
+          </a:fontRef>
+        </p:style>
+      </p:cxnSp>
+      <p:sp>
+        <p:nvSpPr>
+          <p:cNvPr id="12" name="Rounded Rectangle 11"/>
+          <p:cNvSpPr/>
+          <p:nvPr/>
+        </p:nvSpPr>
+        <p:spPr>
+          <a:xfrm>
+            <a:off x="2697480" y="2880360"/>
+            <a:ext cx="2286000" cy="658368"/>
+          </a:xfrm>
+          <a:prstGeom prst="roundRect">
+            <a:avLst/>
+          </a:prstGeom>
+          <a:solidFill>
+            <a:srgbClr val="FBF7F2"/>
+          </a:solidFill>
+          <a:ln w="15875">
+            <a:solidFill>
+              <a:srgbClr val="A44E36"/>
+            </a:solidFill>
+            <a:prstDash val="dash"/>
+          </a:ln>
+          <a:effectLst/>
+        </p:spPr>
+        <p:style>
+          <a:lnRef idx="1">
+            <a:schemeClr val="accent1"/>
+          </a:lnRef>
+          <a:fillRef idx="3">
+            <a:schemeClr val="accent1"/>
+          </a:fillRef>
+          <a:effectRef idx="2">
+            <a:schemeClr val="accent1"/>
+          </a:effectRef>
+          <a:fontRef idx="minor">
+            <a:schemeClr val="lt1"/>
+          </a:fontRef>
+        </p:style>
+        <p:txBody>
+          <a:bodyPr wrap="square" lIns="54864" tIns="27432" rIns="54864" bIns="27432" rtlCol="0" anchor="ctr"/>
+          <a:lstStyle/>
+          <a:p>
+            <a:pPr algn="ctr"/>
+            <a:r>
+              <a:rPr sz="1000" b="1" i="0">
+                <a:solidFill>
+                  <a:srgbClr val="A44E36"/>
+                </a:solidFill>
+                <a:latin typeface="Calibri"/>
+              </a:rPr>
+              <a:t>輸入頻率（中繼台收／你發）</a:t>
+            </a:r>
+          </a:p>
+          <a:p>
+            <a:pPr algn="ctr"/>
+            <a:r>
+              <a:rPr sz="1200" b="0" i="0">
+                <a:solidFill>
+                  <a:srgbClr val="8C7A6E"/>
+                </a:solidFill>
+                <a:latin typeface="Calibri"/>
+              </a:rPr>
+              <a:t>＿＿＿.＿＿＿ MHz</a:t>
+            </a:r>
+          </a:p>
+        </p:txBody>
+      </p:sp>
+      <p:sp>
+        <p:nvSpPr>
+          <p:cNvPr id="13" name="Rounded Rectangle 12"/>
+          <p:cNvSpPr/>
+          <p:nvPr/>
+        </p:nvSpPr>
+        <p:spPr>
+          <a:xfrm>
+            <a:off x="7178040" y="2880360"/>
+            <a:ext cx="2286000" cy="658368"/>
+          </a:xfrm>
+          <a:prstGeom prst="roundRect">
+            <a:avLst/>
+          </a:prstGeom>
+          <a:solidFill>
+            <a:srgbClr val="FBF7F2"/>
+          </a:solidFill>
+          <a:ln w="15875">
+            <a:solidFill>
+              <a:srgbClr val="A44E36"/>
+            </a:solidFill>
+            <a:prstDash val="dash"/>
+          </a:ln>
+          <a:effectLst/>
+        </p:spPr>
+        <p:style>
+          <a:lnRef idx="1">
+            <a:schemeClr val="accent1"/>
+          </a:lnRef>
+          <a:fillRef idx="3">
+            <a:schemeClr val="accent1"/>
+          </a:fillRef>
+          <a:effectRef idx="2">
+            <a:schemeClr val="accent1"/>
+          </a:effectRef>
+          <a:fontRef idx="minor">
+            <a:schemeClr val="lt1"/>
+          </a:fontRef>
+        </p:style>
+        <p:txBody>
+          <a:bodyPr wrap="square" lIns="54864" tIns="27432" rIns="54864" bIns="27432" rtlCol="0" anchor="ctr"/>
+          <a:lstStyle/>
+          <a:p>
+            <a:pPr algn="ctr"/>
+            <a:r>
+              <a:rPr sz="1000" b="1" i="0">
+                <a:solidFill>
+                  <a:srgbClr val="A44E36"/>
+                </a:solidFill>
+                <a:latin typeface="Calibri"/>
+              </a:rPr>
+              <a:t>輸出頻率（中繼台發／你收）</a:t>
+            </a:r>
+          </a:p>
+          <a:p>
+            <a:pPr algn="ctr"/>
+            <a:r>
+              <a:rPr sz="1200" b="0" i="0">
+                <a:solidFill>
+                  <a:srgbClr val="8C7A6E"/>
+                </a:solidFill>
+                <a:latin typeface="Calibri"/>
+              </a:rPr>
+              <a:t>＿＿＿.＿＿＿ MHz</a:t>
+            </a:r>
+          </a:p>
+        </p:txBody>
+      </p:sp>
+      <p:sp>
+        <p:nvSpPr>
+          <p:cNvPr id="14" name="TextBox 13"/>
+          <p:cNvSpPr txBox="1"/>
+          <p:nvPr/>
+        </p:nvSpPr>
+        <p:spPr>
+          <a:xfrm>
+            <a:off x="640080" y="4828032"/>
+            <a:ext cx="10972800" cy="310896"/>
+          </a:xfrm>
+          <a:prstGeom prst="rect">
+            <a:avLst/>
+          </a:prstGeom>
+          <a:noFill/>
+        </p:spPr>
+        <p:txBody>
+          <a:bodyPr wrap="square" lIns="54864" tIns="27432" rIns="54864" bIns="27432" anchor="ctr">
+            <a:spAutoFit/>
+          </a:bodyPr>
+          <a:lstStyle/>
+          <a:p>
+            <a:pPr algn="l"/>
+            <a:r>
+              <a:rPr sz="1200" b="1" i="0">
+                <a:solidFill>
+                  <a:srgbClr val="A44E36"/>
+                </a:solidFill>
+                <a:latin typeface="Cambria"/>
+              </a:rPr>
+              <a:t>中繼台本身還要決定（每項都要說得出為什麼）：</a:t>
+            </a:r>
+          </a:p>
+        </p:txBody>
+      </p:sp>
+      <p:sp>
+        <p:nvSpPr>
+          <p:cNvPr id="15" name="Rounded Rectangle 14"/>
+          <p:cNvSpPr/>
+          <p:nvPr/>
+        </p:nvSpPr>
+        <p:spPr>
+          <a:xfrm>
+            <a:off x="640080" y="5212080"/>
+            <a:ext cx="2615184" cy="960120"/>
+          </a:xfrm>
+          <a:prstGeom prst="roundRect">
+            <a:avLst/>
+          </a:prstGeom>
+          <a:solidFill>
+            <a:srgbClr val="FFFFFF"/>
+          </a:solidFill>
+          <a:ln w="15875">
+            <a:solidFill>
+              <a:srgbClr val="8C7A6E"/>
+            </a:solidFill>
+            <a:prstDash val="dash"/>
+          </a:ln>
+          <a:effectLst/>
+        </p:spPr>
+        <p:style>
+          <a:lnRef idx="1">
+            <a:schemeClr val="accent1"/>
+          </a:lnRef>
+          <a:fillRef idx="3">
+            <a:schemeClr val="accent1"/>
+          </a:fillRef>
+          <a:effectRef idx="2">
+            <a:schemeClr val="accent1"/>
+          </a:effectRef>
+          <a:fontRef idx="minor">
+            <a:schemeClr val="lt1"/>
+          </a:fontRef>
+        </p:style>
+        <p:txBody>
+          <a:bodyPr wrap="square" lIns="54864" tIns="27432" rIns="54864" bIns="27432" rtlCol="0" anchor="ctr"/>
+          <a:lstStyle/>
+          <a:p>
+            <a:pPr algn="ctr"/>
+            <a:r>
+              <a:rPr sz="1100" b="1" i="0">
+                <a:solidFill>
+                  <a:srgbClr val="A44E36"/>
+                </a:solidFill>
+                <a:latin typeface="Cambria"/>
+              </a:rPr>
+              <a:t>位移</a:t>
+            </a:r>
+          </a:p>
+          <a:p>
+            <a:pPr algn="ctr"/>
+            <a:r>
+              <a:rPr sz="1050" b="0" i="0">
+                <a:solidFill>
+                  <a:srgbClr val="8C7A6E"/>
+                </a:solidFill>
+                <a:latin typeface="Calibri"/>
+              </a:rPr>
+              <a:t>方向 □上  □下
+大小 ＿＿＿</a:t>
+            </a:r>
+          </a:p>
+        </p:txBody>
+      </p:sp>
+      <p:sp>
+        <p:nvSpPr>
+          <p:cNvPr id="16" name="Rounded Rectangle 15"/>
+          <p:cNvSpPr/>
+          <p:nvPr/>
+        </p:nvSpPr>
+        <p:spPr>
+          <a:xfrm>
+            <a:off x="3401568" y="5212080"/>
+            <a:ext cx="2615184" cy="960120"/>
+          </a:xfrm>
+          <a:prstGeom prst="roundRect">
+            <a:avLst/>
+          </a:prstGeom>
+          <a:solidFill>
+            <a:srgbClr val="FFFFFF"/>
+          </a:solidFill>
+          <a:ln w="15875">
+            <a:solidFill>
+              <a:srgbClr val="8C7A6E"/>
+            </a:solidFill>
+            <a:prstDash val="dash"/>
+          </a:ln>
+          <a:effectLst/>
+        </p:spPr>
+        <p:style>
+          <a:lnRef idx="1">
+            <a:schemeClr val="accent1"/>
+          </a:lnRef>
+          <a:fillRef idx="3">
+            <a:schemeClr val="accent1"/>
+          </a:fillRef>
+          <a:effectRef idx="2">
+            <a:schemeClr val="accent1"/>
+          </a:effectRef>
+          <a:fontRef idx="minor">
+            <a:schemeClr val="lt1"/>
+          </a:fontRef>
+        </p:style>
+        <p:txBody>
+          <a:bodyPr wrap="square" lIns="54864" tIns="27432" rIns="54864" bIns="27432" rtlCol="0" anchor="ctr"/>
+          <a:lstStyle/>
+          <a:p>
+            <a:pPr algn="ctr"/>
+            <a:r>
+              <a:rPr sz="1100" b="1" i="0">
+                <a:solidFill>
+                  <a:srgbClr val="A44E36"/>
+                </a:solidFill>
+                <a:latin typeface="Cambria"/>
+              </a:rPr>
+              <a:t>亞音（存取）</a:t>
+            </a:r>
+          </a:p>
+          <a:p>
+            <a:pPr algn="ctr"/>
+            <a:r>
+              <a:rPr sz="1050" b="0" i="0">
+                <a:solidFill>
+                  <a:srgbClr val="8C7A6E"/>
+                </a:solidFill>
+                <a:latin typeface="Calibri"/>
+              </a:rPr>
+              <a:t>□開　＿＿＿ Hz
+□關</a:t>
+            </a:r>
+          </a:p>
+        </p:txBody>
+      </p:sp>
+      <p:sp>
+        <p:nvSpPr>
+          <p:cNvPr id="17" name="Rounded Rectangle 16"/>
+          <p:cNvSpPr/>
+          <p:nvPr/>
+        </p:nvSpPr>
+        <p:spPr>
+          <a:xfrm>
+            <a:off x="6163056" y="5212080"/>
+            <a:ext cx="2615184" cy="960120"/>
+          </a:xfrm>
+          <a:prstGeom prst="roundRect">
+            <a:avLst/>
+          </a:prstGeom>
+          <a:solidFill>
+            <a:srgbClr val="FFFFFF"/>
+          </a:solidFill>
+          <a:ln w="15875">
+            <a:solidFill>
+              <a:srgbClr val="8C7A6E"/>
+            </a:solidFill>
+            <a:prstDash val="dash"/>
+          </a:ln>
+          <a:effectLst/>
+        </p:spPr>
+        <p:style>
+          <a:lnRef idx="1">
+            <a:schemeClr val="accent1"/>
+          </a:lnRef>
+          <a:fillRef idx="3">
+            <a:schemeClr val="accent1"/>
+          </a:fillRef>
+          <a:effectRef idx="2">
+            <a:schemeClr val="accent1"/>
+          </a:effectRef>
+          <a:fontRef idx="minor">
+            <a:schemeClr val="lt1"/>
+          </a:fontRef>
+        </p:style>
+        <p:txBody>
+          <a:bodyPr wrap="square" lIns="54864" tIns="27432" rIns="54864" bIns="27432" rtlCol="0" anchor="ctr"/>
+          <a:lstStyle/>
+          <a:p>
+            <a:pPr algn="ctr"/>
+            <a:r>
+              <a:rPr sz="1100" b="1" i="0">
+                <a:solidFill>
+                  <a:srgbClr val="A44E36"/>
+                </a:solidFill>
+                <a:latin typeface="Cambria"/>
+              </a:rPr>
+              <a:t>發射功率＋架高</a:t>
+            </a:r>
+          </a:p>
+          <a:p>
+            <a:pPr algn="ctr"/>
+            <a:r>
+              <a:rPr sz="1050" b="0" i="0">
+                <a:solidFill>
+                  <a:srgbClr val="8C7A6E"/>
+                </a:solidFill>
+                <a:latin typeface="Calibri"/>
+              </a:rPr>
+              <a:t>功率 ＿＿＿
+架高 ＿＿＿</a:t>
+            </a:r>
+          </a:p>
+        </p:txBody>
+      </p:sp>
+      <p:sp>
+        <p:nvSpPr>
+          <p:cNvPr id="18" name="Rounded Rectangle 17"/>
+          <p:cNvSpPr/>
+          <p:nvPr/>
+        </p:nvSpPr>
+        <p:spPr>
+          <a:xfrm>
+            <a:off x="8924544" y="5212080"/>
+            <a:ext cx="2615184" cy="960120"/>
+          </a:xfrm>
+          <a:prstGeom prst="roundRect">
+            <a:avLst/>
+          </a:prstGeom>
+          <a:solidFill>
+            <a:srgbClr val="FFFFFF"/>
+          </a:solidFill>
+          <a:ln w="15875">
+            <a:solidFill>
+              <a:srgbClr val="8C7A6E"/>
+            </a:solidFill>
+            <a:prstDash val="dash"/>
+          </a:ln>
+          <a:effectLst/>
+        </p:spPr>
+        <p:style>
+          <a:lnRef idx="1">
+            <a:schemeClr val="accent1"/>
+          </a:lnRef>
+          <a:fillRef idx="3">
+            <a:schemeClr val="accent1"/>
+          </a:fillRef>
+          <a:effectRef idx="2">
+            <a:schemeClr val="accent1"/>
+          </a:effectRef>
+          <a:fontRef idx="minor">
+            <a:schemeClr val="lt1"/>
+          </a:fontRef>
+        </p:style>
+        <p:txBody>
+          <a:bodyPr wrap="square" lIns="54864" tIns="27432" rIns="54864" bIns="27432" rtlCol="0" anchor="ctr"/>
+          <a:lstStyle/>
+          <a:p>
+            <a:pPr algn="ctr"/>
+            <a:r>
+              <a:rPr sz="1100" b="1" i="0">
+                <a:solidFill>
+                  <a:srgbClr val="A44E36"/>
+                </a:solidFill>
+                <a:latin typeface="Cambria"/>
+              </a:rPr>
+              <a:t>與鄰台協調</a:t>
+            </a:r>
+          </a:p>
+          <a:p>
+            <a:pPr algn="ctr"/>
+            <a:r>
+              <a:rPr sz="1050" b="0" i="0">
+                <a:solidFill>
+                  <a:srgbClr val="8C7A6E"/>
+                </a:solidFill>
+                <a:latin typeface="Calibri"/>
+              </a:rPr>
+              <a:t>輸入/輸出
+是否太近？＿＿</a:t>
+            </a:r>
           </a:p>
         </p:txBody>
       </p:sp>
